--- a/交易策略_20260504.pptx
+++ b/交易策略_20260504.pptx
@@ -3,28 +3,28 @@
 <p:presentation xmlns:a="http://schemas.openxmlformats.org/drawingml/2006/main" xmlns:r="http://schemas.openxmlformats.org/officeDocument/2006/relationships" xmlns:p="http://schemas.openxmlformats.org/presentationml/2006/main" showSpecialPlsOnTitleSld="0">
   <p:sldMasterIdLst>
     <p:sldMasterId id="2147483648" r:id="rId1"/>
-    <p:sldMasterId id="2147483660" r:id="rId2"/>
-    <p:sldMasterId id="2147483672" r:id="rId3"/>
-    <p:sldMasterId id="2147483684" r:id="rId4"/>
-    <p:sldMasterId id="2147483696" r:id="rId5"/>
-    <p:sldMasterId id="2147483708" r:id="rId6"/>
-    <p:sldMasterId id="2147483709" r:id="rId7"/>
-    <p:sldMasterId id="2147483722" r:id="rId8"/>
-    <p:sldMasterId id="2147483723" r:id="rId9"/>
-    <p:sldMasterId id="2147483724" r:id="rId10"/>
-    <p:sldMasterId id="2147483725" r:id="rId11"/>
+    <p:sldMasterId id="2147483660" r:id="rId3"/>
+    <p:sldMasterId id="2147483672" r:id="rId4"/>
+    <p:sldMasterId id="2147483684" r:id="rId5"/>
+    <p:sldMasterId id="2147483696" r:id="rId6"/>
+    <p:sldMasterId id="2147483708" r:id="rId7"/>
+    <p:sldMasterId id="2147483709" r:id="rId8"/>
+    <p:sldMasterId id="2147483722" r:id="rId9"/>
+    <p:sldMasterId id="2147483723" r:id="rId10"/>
+    <p:sldMasterId id="2147483724" r:id="rId11"/>
+    <p:sldMasterId id="2147483725" r:id="rId12"/>
   </p:sldMasterIdLst>
   <p:notesMasterIdLst>
-    <p:notesMasterId r:id="rId13"/>
+    <p:notesMasterId r:id="rId14"/>
   </p:notesMasterIdLst>
   <p:handoutMasterIdLst>
-    <p:handoutMasterId r:id="rId14"/>
+    <p:handoutMasterId r:id="rId15"/>
   </p:handoutMasterIdLst>
   <p:sldIdLst>
-    <p:sldId id="3950" r:id="rId12"/>
+    <p:sldId id="3951" r:id="rId13"/>
   </p:sldIdLst>
   <p:sldSz cx="9144000" cy="6858000" type="screen4x3"/>
-  <p:notesSz cx="6797675" cy="9926638"/>
+  <p:notesSz cx="6797675" cy="9926320"/>
   <p:defaultTextStyle>
     <a:defPPr>
       <a:defRPr lang="zh-TW"/>
@@ -155,38 +155,10 @@
       <p14:sectionLst xmlns:p14="http://schemas.microsoft.com/office/powerpoint/2010/main">
         <p14:section name="預設章節" id="{42AA3BAE-0B5A-4CF3-9EE5-B8ACC2ADE216}">
           <p14:sldIdLst>
-            <p14:sldId id="3950"/>
+            <p14:sldId id="3951"/>
           </p14:sldIdLst>
         </p14:section>
       </p14:sectionLst>
-    </p:ext>
-    <p:ext uri="{EFAFB233-063F-42B5-8137-9DF3F51BA10A}">
-      <p15:sldGuideLst xmlns:p15="http://schemas.microsoft.com/office/powerpoint/2012/main">
-        <p15:guide id="1" orient="horz" pos="2169">
-          <p15:clr>
-            <a:srgbClr val="A4A3A4"/>
-          </p15:clr>
-        </p15:guide>
-        <p15:guide id="2" pos="2807">
-          <p15:clr>
-            <a:srgbClr val="A4A3A4"/>
-          </p15:clr>
-        </p15:guide>
-      </p15:sldGuideLst>
-    </p:ext>
-    <p:ext uri="{2D200454-40CA-4A62-9FC3-DE9A4176ACB9}">
-      <p15:notesGuideLst xmlns:p15="http://schemas.microsoft.com/office/powerpoint/2012/main">
-        <p15:guide id="1" orient="horz" pos="3140">
-          <p15:clr>
-            <a:srgbClr val="A4A3A4"/>
-          </p15:clr>
-        </p15:guide>
-        <p15:guide id="2" pos="2087">
-          <p15:clr>
-            <a:srgbClr val="A4A3A4"/>
-          </p15:clr>
-        </p15:guide>
-      </p15:notesGuideLst>
     </p:ext>
   </p:extLst>
 </p:presentation>
@@ -199,9 +171,9 @@
 </file>
 
 <file path=ppt/charts/chart1.xml><?xml version="1.0" encoding="utf-8"?>
-<c:chartSpace xmlns:c="http://schemas.openxmlformats.org/drawingml/2006/chart" xmlns:a="http://schemas.openxmlformats.org/drawingml/2006/main" xmlns:r="http://schemas.openxmlformats.org/officeDocument/2006/relationships" xmlns:c16r2="http://schemas.microsoft.com/office/drawing/2015/06/chart">
+<c:chartSpace xmlns:c="http://schemas.openxmlformats.org/drawingml/2006/chart" xmlns:a="http://schemas.openxmlformats.org/drawingml/2006/main" xmlns:r="http://schemas.openxmlformats.org/officeDocument/2006/relationships">
   <c:date1904 val="0"/>
-  <c:lang val="zh-TW"/>
+  <c:lang val="zh-CN"/>
   <c:roundedCorners val="0"/>
   <mc:AlternateContent xmlns:mc="http://schemas.openxmlformats.org/markup-compatibility/2006">
     <mc:Choice xmlns:c14="http://schemas.microsoft.com/office/drawing/2007/8/2/chart" Requires="c14">
@@ -233,17 +205,33 @@
               </a:defRPr>
             </a:pPr>
             <a:r>
-              <a:rPr lang="zh-TW" altLang="en-US" sz="1400" b="1">
+              <a:rPr sz="1400" b="1">
                 <a:latin typeface="微軟正黑體" panose="020B0604030504040204" pitchFamily="34" charset="-120"/>
                 <a:ea typeface="微軟正黑體" panose="020B0604030504040204" pitchFamily="34" charset="-120"/>
                 <a:cs typeface="微軟正黑體" panose="020B0604030504040204" pitchFamily="34" charset="-120"/>
                 <a:sym typeface="微軟正黑體" panose="020B0604030504040204" pitchFamily="34" charset="-120"/>
               </a:rPr>
-              <a:t>市場隱含今明兩年各升息約兩次半碼</a:t>
-            </a:r>
+              <a:t>市場隱含今年升息約</a:t>
+            </a:r>
+            <a:r>
+              <a:rPr sz="1400" b="1">
+                <a:latin typeface="微軟正黑體" panose="020B0604030504040204" pitchFamily="34" charset="-120"/>
+                <a:ea typeface="微軟正黑體" panose="020B0604030504040204" pitchFamily="34" charset="-120"/>
+                <a:cs typeface="微軟正黑體" panose="020B0604030504040204" pitchFamily="34" charset="-120"/>
+                <a:sym typeface="微軟正黑體" panose="020B0604030504040204" pitchFamily="34" charset="-120"/>
+              </a:rPr>
+              <a:t>兩次、明年升息三次半碼</a:t>
+            </a:r>
+            <a:endParaRPr sz="1400" b="1">
+              <a:latin typeface="微軟正黑體" panose="020B0604030504040204" pitchFamily="34" charset="-120"/>
+              <a:ea typeface="微軟正黑體" panose="020B0604030504040204" pitchFamily="34" charset="-120"/>
+              <a:cs typeface="微軟正黑體" panose="020B0604030504040204" pitchFamily="34" charset="-120"/>
+              <a:sym typeface="微軟正黑體" panose="020B0604030504040204" pitchFamily="34" charset="-120"/>
+            </a:endParaRPr>
           </a:p>
         </c:rich>
       </c:tx>
+      <c:layout/>
       <c:overlay val="0"/>
       <c:spPr>
         <a:noFill/>
@@ -252,27 +240,6 @@
         </a:ln>
         <a:effectLst/>
       </c:spPr>
-      <c:txPr>
-        <a:bodyPr rot="0" spcFirstLastPara="0" vertOverflow="ellipsis" vert="horz" wrap="square" anchor="ctr" anchorCtr="1"/>
-        <a:lstStyle/>
-        <a:p>
-          <a:pPr defTabSz="914400">
-            <a:defRPr lang="zh-TW" sz="1400" b="1" i="0" u="none" strike="noStrike" kern="1200" spc="0" baseline="0">
-              <a:solidFill>
-                <a:schemeClr val="tx1">
-                  <a:lumMod val="65000"/>
-                  <a:lumOff val="35000"/>
-                </a:schemeClr>
-              </a:solidFill>
-              <a:latin typeface="微軟正黑體" panose="020B0604030504040204" pitchFamily="34" charset="-120"/>
-              <a:ea typeface="微軟正黑體" panose="020B0604030504040204" pitchFamily="34" charset="-120"/>
-              <a:cs typeface="微軟正黑體" panose="020B0604030504040204" pitchFamily="34" charset="-120"/>
-              <a:sym typeface="微軟正黑體" panose="020B0604030504040204" pitchFamily="34" charset="-120"/>
-            </a:defRPr>
-          </a:pPr>
-          <a:endParaRPr lang="zh-TW"/>
-        </a:p>
-      </c:txPr>
     </c:title>
     <c:autoTitleDeleted val="0"/>
     <c:plotArea>
@@ -310,6 +277,7 @@
           <c:dLbls>
             <c:dLbl>
               <c:idx val="1"/>
+              <c:layout/>
               <c:tx>
                 <c:rich>
                   <a:bodyPr rot="0" spcFirstLastPara="0" vertOverflow="ellipsis" vert="horz" wrap="square" lIns="38100" tIns="19050" rIns="38100" bIns="19050" anchor="ctr" anchorCtr="1"/>
@@ -330,7 +298,7 @@
                       </a:defRPr>
                     </a:pPr>
                     <a:r>
-                      <a:rPr lang="en-US" altLang="zh-TW" sz="1200">
+                      <a:rPr sz="1200">
                         <a:latin typeface="Calibri" panose="020F0502020204030204" pitchFamily="34" charset="0"/>
                         <a:ea typeface="Calibri" panose="020F0502020204030204" pitchFamily="34" charset="0"/>
                         <a:cs typeface="Calibri" panose="020F0502020204030204" pitchFamily="34" charset="0"/>
@@ -338,9 +306,16 @@
                       </a:rPr>
                       <a:t>1.74%</a:t>
                     </a:r>
+                    <a:endParaRPr sz="1200">
+                      <a:latin typeface="Calibri" panose="020F0502020204030204" pitchFamily="34" charset="0"/>
+                      <a:ea typeface="Calibri" panose="020F0502020204030204" pitchFamily="34" charset="0"/>
+                      <a:cs typeface="Calibri" panose="020F0502020204030204" pitchFamily="34" charset="0"/>
+                      <a:sym typeface="Calibri" panose="020F0502020204030204" pitchFamily="34" charset="0"/>
+                    </a:endParaRPr>
                   </a:p>
                 </c:rich>
               </c:tx>
+              <c:numFmt formatCode="General" sourceLinked="1"/>
               <c:spPr>
                 <a:noFill/>
                 <a:ln>
@@ -352,7 +327,7 @@
                 <a:bodyPr rot="0" spcFirstLastPara="0" vertOverflow="ellipsis" vert="horz" wrap="square" lIns="38100" tIns="19050" rIns="38100" bIns="19050" anchor="ctr" anchorCtr="1"/>
                 <a:lstStyle/>
                 <a:p>
-                  <a:pPr defTabSz="914400">
+                  <a:pPr>
                     <a:defRPr lang="zh-TW" sz="1200" b="1" i="0" u="none" strike="noStrike" kern="1200" baseline="0">
                       <a:solidFill>
                         <a:schemeClr val="tx1">
@@ -366,7 +341,6 @@
                       <a:sym typeface="Calibri" panose="020F0502020204030204" pitchFamily="34" charset="0"/>
                     </a:defRPr>
                   </a:pPr>
-                  <a:endParaRPr lang="zh-TW"/>
                 </a:p>
               </c:txPr>
               <c:dLblPos val="t"/>
@@ -377,74 +351,7 @@
               <c:showPercent val="0"/>
               <c:showBubbleSize val="0"/>
               <c:extLst>
-                <c:ext xmlns:c15="http://schemas.microsoft.com/office/drawing/2012/chart" uri="{CE6537A1-D6FC-4f65-9D91-7224C49458BB}">
-                  <c15:showDataLabelsRange val="0"/>
-                </c:ext>
-                <c:ext xmlns:c16="http://schemas.microsoft.com/office/drawing/2014/chart" uri="{C3380CC4-5D6E-409C-BE32-E72D297353CC}">
-                  <c16:uniqueId val="{00000000-904F-4637-BF17-B2EB27BD7FFA}"/>
-                </c:ext>
-              </c:extLst>
-            </c:dLbl>
-            <c:dLbl>
-              <c:idx val="2"/>
-              <c:tx>
-                <c:rich>
-                  <a:bodyPr/>
-                  <a:lstStyle/>
-                  <a:p>
-                    <a:r>
-                      <a:rPr lang="en-US" altLang="zh-TW"/>
-                      <a:t>1.83</a:t>
-                    </a:r>
-                    <a:endParaRPr lang="en-US" altLang="zh-TW" dirty="0"/>
-                  </a:p>
-                </c:rich>
-              </c:tx>
-              <c:dLblPos val="t"/>
-              <c:showLegendKey val="0"/>
-              <c:showVal val="1"/>
-              <c:showCatName val="0"/>
-              <c:showSerName val="0"/>
-              <c:showPercent val="0"/>
-              <c:showBubbleSize val="0"/>
-              <c:extLst>
-                <c:ext xmlns:c15="http://schemas.microsoft.com/office/drawing/2012/chart" uri="{CE6537A1-D6FC-4f65-9D91-7224C49458BB}">
-                  <c15:showDataLabelsRange val="0"/>
-                </c:ext>
-                <c:ext xmlns:c16="http://schemas.microsoft.com/office/drawing/2014/chart" uri="{C3380CC4-5D6E-409C-BE32-E72D297353CC}">
-                  <c16:uniqueId val="{00000003-904F-4637-BF17-B2EB27BD7FFA}"/>
-                </c:ext>
-              </c:extLst>
-            </c:dLbl>
-            <c:dLbl>
-              <c:idx val="7"/>
-              <c:tx>
-                <c:rich>
-                  <a:bodyPr/>
-                  <a:lstStyle/>
-                  <a:p>
-                    <a:r>
-                      <a:rPr lang="en-US" altLang="zh-TW"/>
-                      <a:t>2.21%</a:t>
-                    </a:r>
-                    <a:endParaRPr lang="en-US" altLang="zh-TW" dirty="0"/>
-                  </a:p>
-                </c:rich>
-              </c:tx>
-              <c:dLblPos val="t"/>
-              <c:showLegendKey val="0"/>
-              <c:showVal val="1"/>
-              <c:showCatName val="0"/>
-              <c:showSerName val="0"/>
-              <c:showPercent val="0"/>
-              <c:showBubbleSize val="0"/>
-              <c:extLst>
-                <c:ext xmlns:c15="http://schemas.microsoft.com/office/drawing/2012/chart" uri="{CE6537A1-D6FC-4f65-9D91-7224C49458BB}">
-                  <c15:showDataLabelsRange val="0"/>
-                </c:ext>
-                <c:ext xmlns:c16="http://schemas.microsoft.com/office/drawing/2014/chart" uri="{C3380CC4-5D6E-409C-BE32-E72D297353CC}">
-                  <c16:uniqueId val="{00000002-904F-4637-BF17-B2EB27BD7FFA}"/>
-                </c:ext>
+                <c:ext xmlns:c15="http://schemas.microsoft.com/office/drawing/2012/chart" uri="{CE6537A1-D6FC-4f65-9D91-7224C49458BB}"/>
               </c:extLst>
             </c:dLbl>
             <c:spPr>
@@ -472,7 +379,6 @@
                     <a:sym typeface="Calibri" panose="020F0502020204030204" pitchFamily="34" charset="0"/>
                   </a:defRPr>
                 </a:pPr>
-                <a:endParaRPr lang="zh-TW"/>
               </a:p>
             </c:txPr>
             <c:dLblPos val="t"/>
@@ -485,6 +391,7 @@
             <c:showLeaderLines val="0"/>
             <c:extLst>
               <c:ext xmlns:c15="http://schemas.microsoft.com/office/drawing/2012/chart" uri="{CE6537A1-D6FC-4f65-9D91-7224C49458BB}">
+                <c15:layout/>
                 <c15:showLeaderLines val="1"/>
                 <c15:leaderLines>
                   <c:spPr>
@@ -552,38 +459,33 @@
                 <c:formatCode>0.000%</c:formatCode>
                 <c:ptCount val="8"/>
                 <c:pt idx="0">
-                  <c:v>1.678E-2</c:v>
+                  <c:v>0.01678</c:v>
                 </c:pt>
                 <c:pt idx="1">
-                  <c:v>1.7399999999999999E-2</c:v>
+                  <c:v>0.01745</c:v>
                 </c:pt>
-                <c:pt idx="2" formatCode="0.00%">
-                  <c:v>1.84E-2</c:v>
+                <c:pt idx="2" c:formatCode="0.00%">
+                  <c:v>0.0185</c:v>
                 </c:pt>
-                <c:pt idx="3" formatCode="0.00%">
-                  <c:v>1.9099999999999999E-2</c:v>
+                <c:pt idx="3" c:formatCode="0.00%">
+                  <c:v>0.0195</c:v>
                 </c:pt>
-                <c:pt idx="4" formatCode="0.00%">
-                  <c:v>1.9769999999999999E-2</c:v>
+                <c:pt idx="4" c:formatCode="0.00%">
+                  <c:v>0.0205</c:v>
                 </c:pt>
-                <c:pt idx="5" formatCode="0.00%">
-                  <c:v>2.0500000000000001E-2</c:v>
+                <c:pt idx="5" c:formatCode="0.00%">
+                  <c:v>0.0215</c:v>
                 </c:pt>
-                <c:pt idx="6" formatCode="0.00%">
-                  <c:v>2.128E-2</c:v>
+                <c:pt idx="6" c:formatCode="0.00%">
+                  <c:v>0.0225</c:v>
                 </c:pt>
-                <c:pt idx="7" formatCode="0.00%">
-                  <c:v>2.1999999999999999E-2</c:v>
+                <c:pt idx="7" c:formatCode="0.00%">
+                  <c:v>0.0235</c:v>
                 </c:pt>
               </c:numCache>
             </c:numRef>
           </c:val>
           <c:smooth val="0"/>
-          <c:extLst>
-            <c:ext xmlns:c16="http://schemas.microsoft.com/office/drawing/2014/chart" uri="{C3380CC4-5D6E-409C-BE32-E72D297353CC}">
-              <c16:uniqueId val="{00000001-904F-4637-BF17-B2EB27BD7FFA}"/>
-            </c:ext>
-          </c:extLst>
         </c:ser>
         <c:dLbls>
           <c:showLegendKey val="0"/>
@@ -605,7 +507,6 @@
         </c:scaling>
         <c:delete val="0"/>
         <c:axPos val="b"/>
-        <c:numFmt formatCode="General" sourceLinked="0"/>
         <c:majorTickMark val="none"/>
         <c:minorTickMark val="none"/>
         <c:tickLblPos val="nextTo"/>
@@ -627,7 +528,7 @@
           <a:lstStyle/>
           <a:p>
             <a:pPr>
-              <a:defRPr lang="zh-TW" sz="1000" b="1" i="0" u="none" strike="noStrike" kern="1200" baseline="0">
+              <a:defRPr lang="zh-TW" sz="1100" b="1" i="0" u="none" strike="noStrike" kern="1200" baseline="0">
                 <a:solidFill>
                   <a:schemeClr val="tx1">
                     <a:lumMod val="65000"/>
@@ -640,7 +541,6 @@
                 <a:sym typeface="Calibri" panose="020F0502020204030204" pitchFamily="34" charset="0"/>
               </a:defRPr>
             </a:pPr>
-            <a:endParaRPr lang="zh-TW"/>
           </a:p>
         </c:txPr>
         <c:crossAx val="796456255"/>
@@ -654,7 +554,7 @@
         <c:axId val="796456255"/>
         <c:scaling>
           <c:orientation val="minMax"/>
-          <c:min val="1.4999999999999999E-2"/>
+          <c:min val="0.016"/>
         </c:scaling>
         <c:delete val="0"/>
         <c:axPos val="l"/>
@@ -687,12 +587,12 @@
                 <a:sym typeface="Calibri" panose="020F0502020204030204" pitchFamily="34" charset="0"/>
               </a:defRPr>
             </a:pPr>
-            <a:endParaRPr lang="zh-TW"/>
           </a:p>
         </c:txPr>
         <c:crossAx val="903886952"/>
         <c:crosses val="autoZero"/>
         <c:crossBetween val="between"/>
+        <c:majorUnit val="0.002"/>
       </c:valAx>
       <c:spPr>
         <a:noFill/>
@@ -725,10 +625,9 @@
       <a:pPr>
         <a:defRPr lang="zh-TW"/>
       </a:pPr>
-      <a:endParaRPr lang="zh-TW"/>
     </a:p>
   </c:txPr>
-  <c:externalData r:id="rId3">
+  <c:externalData r:id="rId1">
     <c:autoUpdate val="0"/>
   </c:externalData>
 </c:chartSpace>
@@ -1468,18 +1367,12 @@
             </a:pPr>
             <a:fld id="{EA90D26C-E35A-450B-90C7-84C2B9602168}" type="slidenum">
               <a:rPr lang="en-US" altLang="zh-TW"/>
-              <a:t>‹#›</a:t>
             </a:fld>
             <a:endParaRPr lang="en-US" altLang="zh-TW"/>
           </a:p>
         </p:txBody>
       </p:sp>
     </p:spTree>
-    <p:extLst>
-      <p:ext uri="{BB962C8B-B14F-4D97-AF65-F5344CB8AC3E}">
-        <p14:creationId xmlns:p14="http://schemas.microsoft.com/office/powerpoint/2010/main" val="1"/>
-      </p:ext>
-    </p:extLst>
   </p:cSld>
   <p:clrMap bg1="lt1" tx1="dk1" bg2="lt2" tx2="dk2" accent1="accent1" accent2="accent2" accent3="accent3" accent4="accent4" accent5="accent5" accent6="accent6" hlink="hlink" folHlink="folHlink"/>
 </p:handoutMaster>
@@ -1655,6 +1548,7 @@
               <a:rPr lang="zh-TW" altLang="en-US" noProof="0"/>
               <a:t>按一下以編輯母片</a:t>
             </a:r>
+            <a:endParaRPr lang="zh-TW" altLang="en-US" noProof="0"/>
           </a:p>
           <a:p>
             <a:pPr lvl="1"/>
@@ -1662,6 +1556,7 @@
               <a:rPr lang="zh-TW" altLang="en-US" noProof="0"/>
               <a:t>第二層</a:t>
             </a:r>
+            <a:endParaRPr lang="zh-TW" altLang="en-US" noProof="0"/>
           </a:p>
           <a:p>
             <a:pPr lvl="2"/>
@@ -1669,6 +1564,7 @@
               <a:rPr lang="zh-TW" altLang="en-US" noProof="0"/>
               <a:t>第三層</a:t>
             </a:r>
+            <a:endParaRPr lang="zh-TW" altLang="en-US" noProof="0"/>
           </a:p>
           <a:p>
             <a:pPr lvl="3"/>
@@ -1676,6 +1572,7 @@
               <a:rPr lang="zh-TW" altLang="en-US" noProof="0"/>
               <a:t>第四層</a:t>
             </a:r>
+            <a:endParaRPr lang="zh-TW" altLang="en-US" noProof="0"/>
           </a:p>
           <a:p>
             <a:pPr lvl="4"/>
@@ -1683,6 +1580,7 @@
               <a:rPr lang="zh-TW" altLang="en-US" noProof="0"/>
               <a:t>第五層</a:t>
             </a:r>
+            <a:endParaRPr lang="zh-TW" altLang="en-US" noProof="0"/>
           </a:p>
         </p:txBody>
       </p:sp>
@@ -1768,7 +1666,6 @@
             </a:pPr>
             <a:fld id="{360372AD-F29F-4D0F-B513-7219CBDC5F6C}" type="slidenum">
               <a:rPr lang="en-US" altLang="zh-TW"/>
-              <a:t>‹#›</a:t>
             </a:fld>
             <a:endParaRPr lang="en-US" altLang="zh-TW"/>
           </a:p>
@@ -1943,6 +1840,7 @@
               <a:rPr lang="zh-TW" altLang="en-US"/>
               <a:t>按一下以編輯母片標題樣式</a:t>
             </a:r>
+            <a:endParaRPr lang="zh-TW" altLang="en-US"/>
           </a:p>
         </p:txBody>
       </p:sp>
@@ -2007,6 +1905,7 @@
               <a:rPr lang="zh-TW" altLang="en-US"/>
               <a:t>按一下以編輯母片副標題樣式</a:t>
             </a:r>
+            <a:endParaRPr lang="zh-TW" altLang="en-US"/>
           </a:p>
         </p:txBody>
       </p:sp>
@@ -2034,7 +1933,6 @@
             </a:pPr>
             <a:fld id="{35A91DC3-1E7A-4B25-8F56-B5B9998B32DD}" type="slidenum">
               <a:rPr lang="zh-TW" altLang="en-US"/>
-              <a:t>‹#›</a:t>
             </a:fld>
             <a:endParaRPr lang="en-US" altLang="zh-TW"/>
           </a:p>
@@ -2084,6 +1982,7 @@
               <a:rPr lang="zh-TW" altLang="en-US"/>
               <a:t>按一下以編輯母片標題樣式</a:t>
             </a:r>
+            <a:endParaRPr lang="zh-TW" altLang="en-US"/>
           </a:p>
         </p:txBody>
       </p:sp>
@@ -2107,6 +2006,7 @@
               <a:rPr lang="zh-TW" altLang="en-US"/>
               <a:t>按一下以編輯母片文字樣式</a:t>
             </a:r>
+            <a:endParaRPr lang="zh-TW" altLang="en-US"/>
           </a:p>
           <a:p>
             <a:pPr lvl="1"/>
@@ -2114,6 +2014,7 @@
               <a:rPr lang="zh-TW" altLang="en-US"/>
               <a:t>第二層</a:t>
             </a:r>
+            <a:endParaRPr lang="zh-TW" altLang="en-US"/>
           </a:p>
           <a:p>
             <a:pPr lvl="2"/>
@@ -2121,6 +2022,7 @@
               <a:rPr lang="zh-TW" altLang="en-US"/>
               <a:t>第三層</a:t>
             </a:r>
+            <a:endParaRPr lang="zh-TW" altLang="en-US"/>
           </a:p>
           <a:p>
             <a:pPr lvl="3"/>
@@ -2128,6 +2030,7 @@
               <a:rPr lang="zh-TW" altLang="en-US"/>
               <a:t>第四層</a:t>
             </a:r>
+            <a:endParaRPr lang="zh-TW" altLang="en-US"/>
           </a:p>
           <a:p>
             <a:pPr lvl="4"/>
@@ -2135,6 +2038,7 @@
               <a:rPr lang="zh-TW" altLang="en-US"/>
               <a:t>第五層</a:t>
             </a:r>
+            <a:endParaRPr lang="zh-TW" altLang="en-US"/>
           </a:p>
         </p:txBody>
       </p:sp>
@@ -2162,7 +2066,6 @@
             </a:pPr>
             <a:fld id="{EDC0AC26-B1DC-4AE7-A939-642DE9D4B085}" type="slidenum">
               <a:rPr lang="zh-TW" altLang="en-US"/>
-              <a:t>‹#›</a:t>
             </a:fld>
             <a:endParaRPr lang="en-US" altLang="zh-TW"/>
           </a:p>
@@ -2217,6 +2120,7 @@
               <a:rPr lang="zh-TW" altLang="en-US"/>
               <a:t>按一下以編輯母片標題樣式</a:t>
             </a:r>
+            <a:endParaRPr lang="zh-TW" altLang="en-US"/>
           </a:p>
         </p:txBody>
       </p:sp>
@@ -2245,6 +2149,7 @@
               <a:rPr lang="zh-TW" altLang="en-US"/>
               <a:t>按一下以編輯母片文字樣式</a:t>
             </a:r>
+            <a:endParaRPr lang="zh-TW" altLang="en-US"/>
           </a:p>
           <a:p>
             <a:pPr lvl="1"/>
@@ -2252,6 +2157,7 @@
               <a:rPr lang="zh-TW" altLang="en-US"/>
               <a:t>第二層</a:t>
             </a:r>
+            <a:endParaRPr lang="zh-TW" altLang="en-US"/>
           </a:p>
           <a:p>
             <a:pPr lvl="2"/>
@@ -2259,6 +2165,7 @@
               <a:rPr lang="zh-TW" altLang="en-US"/>
               <a:t>第三層</a:t>
             </a:r>
+            <a:endParaRPr lang="zh-TW" altLang="en-US"/>
           </a:p>
           <a:p>
             <a:pPr lvl="3"/>
@@ -2266,6 +2173,7 @@
               <a:rPr lang="zh-TW" altLang="en-US"/>
               <a:t>第四層</a:t>
             </a:r>
+            <a:endParaRPr lang="zh-TW" altLang="en-US"/>
           </a:p>
           <a:p>
             <a:pPr lvl="4"/>
@@ -2273,6 +2181,7 @@
               <a:rPr lang="zh-TW" altLang="en-US"/>
               <a:t>第五層</a:t>
             </a:r>
+            <a:endParaRPr lang="zh-TW" altLang="en-US"/>
           </a:p>
         </p:txBody>
       </p:sp>
@@ -2300,7 +2209,6 @@
             </a:pPr>
             <a:fld id="{5BBDB87F-1281-41B6-A636-95C78B523A08}" type="slidenum">
               <a:rPr lang="zh-TW" altLang="en-US"/>
-              <a:t>‹#›</a:t>
             </a:fld>
             <a:endParaRPr lang="en-US" altLang="zh-TW"/>
           </a:p>
@@ -2355,6 +2263,7 @@
               <a:rPr lang="zh-TW" altLang="en-US"/>
               <a:t>按一下以編輯母片標題樣式</a:t>
             </a:r>
+            <a:endParaRPr lang="zh-TW" altLang="en-US"/>
           </a:p>
         </p:txBody>
       </p:sp>
@@ -2419,6 +2328,7 @@
               <a:rPr lang="zh-TW" altLang="en-US"/>
               <a:t>按一下以編輯母片副標題樣式</a:t>
             </a:r>
+            <a:endParaRPr lang="zh-TW" altLang="en-US"/>
           </a:p>
         </p:txBody>
       </p:sp>
@@ -2447,7 +2357,6 @@
                   <a:srgbClr val="000000"/>
                 </a:solidFill>
               </a:rPr>
-              <a:t>‹#›</a:t>
             </a:fld>
             <a:endParaRPr lang="en-US" altLang="zh-TW">
               <a:solidFill>
@@ -2501,6 +2410,7 @@
               <a:rPr lang="zh-TW" altLang="en-US"/>
               <a:t>按一下以編輯母片標題樣式</a:t>
             </a:r>
+            <a:endParaRPr lang="zh-TW" altLang="en-US"/>
           </a:p>
         </p:txBody>
       </p:sp>
@@ -2524,6 +2434,7 @@
               <a:rPr lang="zh-TW" altLang="en-US"/>
               <a:t>按一下以編輯母片文字樣式</a:t>
             </a:r>
+            <a:endParaRPr lang="zh-TW" altLang="en-US"/>
           </a:p>
           <a:p>
             <a:pPr lvl="1"/>
@@ -2531,6 +2442,7 @@
               <a:rPr lang="zh-TW" altLang="en-US"/>
               <a:t>第二層</a:t>
             </a:r>
+            <a:endParaRPr lang="zh-TW" altLang="en-US"/>
           </a:p>
           <a:p>
             <a:pPr lvl="2"/>
@@ -2538,6 +2450,7 @@
               <a:rPr lang="zh-TW" altLang="en-US"/>
               <a:t>第三層</a:t>
             </a:r>
+            <a:endParaRPr lang="zh-TW" altLang="en-US"/>
           </a:p>
           <a:p>
             <a:pPr lvl="3"/>
@@ -2545,6 +2458,7 @@
               <a:rPr lang="zh-TW" altLang="en-US"/>
               <a:t>第四層</a:t>
             </a:r>
+            <a:endParaRPr lang="zh-TW" altLang="en-US"/>
           </a:p>
           <a:p>
             <a:pPr lvl="4"/>
@@ -2552,6 +2466,7 @@
               <a:rPr lang="zh-TW" altLang="en-US"/>
               <a:t>第五層</a:t>
             </a:r>
+            <a:endParaRPr lang="zh-TW" altLang="en-US"/>
           </a:p>
         </p:txBody>
       </p:sp>
@@ -2580,7 +2495,6 @@
                   <a:srgbClr val="000000"/>
                 </a:solidFill>
               </a:rPr>
-              <a:t>‹#›</a:t>
             </a:fld>
             <a:endParaRPr lang="en-US" altLang="zh-TW">
               <a:solidFill>
@@ -2643,6 +2557,7 @@
               <a:rPr lang="zh-TW" altLang="en-US"/>
               <a:t>按一下以編輯母片標題樣式</a:t>
             </a:r>
+            <a:endParaRPr lang="zh-TW" altLang="en-US"/>
           </a:p>
         </p:txBody>
       </p:sp>
@@ -2708,6 +2623,7 @@
               <a:rPr lang="zh-TW" altLang="en-US"/>
               <a:t>按一下以編輯母片文字樣式</a:t>
             </a:r>
+            <a:endParaRPr lang="zh-TW" altLang="en-US"/>
           </a:p>
         </p:txBody>
       </p:sp>
@@ -2736,7 +2652,6 @@
                   <a:srgbClr val="000000"/>
                 </a:solidFill>
               </a:rPr>
-              <a:t>‹#›</a:t>
             </a:fld>
             <a:endParaRPr lang="en-US" altLang="zh-TW">
               <a:solidFill>
@@ -2790,6 +2705,7 @@
               <a:rPr lang="zh-TW" altLang="en-US" dirty="0"/>
               <a:t>按一下以編輯母片標題樣式</a:t>
             </a:r>
+            <a:endParaRPr lang="zh-TW" altLang="en-US" dirty="0"/>
           </a:p>
         </p:txBody>
       </p:sp>
@@ -2846,6 +2762,7 @@
               <a:rPr lang="zh-TW" altLang="en-US"/>
               <a:t>按一下以編輯母片文字樣式</a:t>
             </a:r>
+            <a:endParaRPr lang="zh-TW" altLang="en-US"/>
           </a:p>
           <a:p>
             <a:pPr lvl="1"/>
@@ -2853,6 +2770,7 @@
               <a:rPr lang="zh-TW" altLang="en-US"/>
               <a:t>第二層</a:t>
             </a:r>
+            <a:endParaRPr lang="zh-TW" altLang="en-US"/>
           </a:p>
           <a:p>
             <a:pPr lvl="2"/>
@@ -2860,6 +2778,7 @@
               <a:rPr lang="zh-TW" altLang="en-US"/>
               <a:t>第三層</a:t>
             </a:r>
+            <a:endParaRPr lang="zh-TW" altLang="en-US"/>
           </a:p>
           <a:p>
             <a:pPr lvl="3"/>
@@ -2867,6 +2786,7 @@
               <a:rPr lang="zh-TW" altLang="en-US"/>
               <a:t>第四層</a:t>
             </a:r>
+            <a:endParaRPr lang="zh-TW" altLang="en-US"/>
           </a:p>
           <a:p>
             <a:pPr lvl="4"/>
@@ -2874,6 +2794,7 @@
               <a:rPr lang="zh-TW" altLang="en-US"/>
               <a:t>第五層</a:t>
             </a:r>
+            <a:endParaRPr lang="zh-TW" altLang="en-US"/>
           </a:p>
         </p:txBody>
       </p:sp>
@@ -2930,6 +2851,7 @@
               <a:rPr lang="zh-TW" altLang="en-US" dirty="0"/>
               <a:t>按一下以編輯母片文字樣式</a:t>
             </a:r>
+            <a:endParaRPr lang="zh-TW" altLang="en-US" dirty="0"/>
           </a:p>
           <a:p>
             <a:pPr lvl="1"/>
@@ -2937,6 +2859,7 @@
               <a:rPr lang="zh-TW" altLang="en-US" dirty="0"/>
               <a:t>第二層</a:t>
             </a:r>
+            <a:endParaRPr lang="zh-TW" altLang="en-US" dirty="0"/>
           </a:p>
           <a:p>
             <a:pPr lvl="2"/>
@@ -2944,6 +2867,7 @@
               <a:rPr lang="zh-TW" altLang="en-US" dirty="0"/>
               <a:t>第三層</a:t>
             </a:r>
+            <a:endParaRPr lang="zh-TW" altLang="en-US" dirty="0"/>
           </a:p>
           <a:p>
             <a:pPr lvl="3"/>
@@ -2951,6 +2875,7 @@
               <a:rPr lang="zh-TW" altLang="en-US" dirty="0"/>
               <a:t>第四層</a:t>
             </a:r>
+            <a:endParaRPr lang="zh-TW" altLang="en-US" dirty="0"/>
           </a:p>
           <a:p>
             <a:pPr lvl="4"/>
@@ -2958,6 +2883,7 @@
               <a:rPr lang="zh-TW" altLang="en-US" dirty="0"/>
               <a:t>第五層</a:t>
             </a:r>
+            <a:endParaRPr lang="zh-TW" altLang="en-US" dirty="0"/>
           </a:p>
         </p:txBody>
       </p:sp>
@@ -2986,7 +2912,6 @@
                   <a:srgbClr val="000000"/>
                 </a:solidFill>
               </a:rPr>
-              <a:t>‹#›</a:t>
             </a:fld>
             <a:endParaRPr lang="en-US" altLang="zh-TW" dirty="0">
               <a:solidFill>
@@ -3049,6 +2974,7 @@
               <a:rPr lang="zh-TW" altLang="en-US"/>
               <a:t>按一下以編輯母片標題樣式</a:t>
             </a:r>
+            <a:endParaRPr lang="zh-TW" altLang="en-US"/>
           </a:p>
         </p:txBody>
       </p:sp>
@@ -3114,6 +3040,7 @@
               <a:rPr lang="zh-TW" altLang="en-US"/>
               <a:t>按一下以編輯母片文字樣式</a:t>
             </a:r>
+            <a:endParaRPr lang="zh-TW" altLang="en-US"/>
           </a:p>
         </p:txBody>
       </p:sp>
@@ -3170,6 +3097,7 @@
               <a:rPr lang="zh-TW" altLang="en-US"/>
               <a:t>按一下以編輯母片文字樣式</a:t>
             </a:r>
+            <a:endParaRPr lang="zh-TW" altLang="en-US"/>
           </a:p>
           <a:p>
             <a:pPr lvl="1"/>
@@ -3177,6 +3105,7 @@
               <a:rPr lang="zh-TW" altLang="en-US"/>
               <a:t>第二層</a:t>
             </a:r>
+            <a:endParaRPr lang="zh-TW" altLang="en-US"/>
           </a:p>
           <a:p>
             <a:pPr lvl="2"/>
@@ -3184,6 +3113,7 @@
               <a:rPr lang="zh-TW" altLang="en-US"/>
               <a:t>第三層</a:t>
             </a:r>
+            <a:endParaRPr lang="zh-TW" altLang="en-US"/>
           </a:p>
           <a:p>
             <a:pPr lvl="3"/>
@@ -3191,6 +3121,7 @@
               <a:rPr lang="zh-TW" altLang="en-US"/>
               <a:t>第四層</a:t>
             </a:r>
+            <a:endParaRPr lang="zh-TW" altLang="en-US"/>
           </a:p>
           <a:p>
             <a:pPr lvl="4"/>
@@ -3198,6 +3129,7 @@
               <a:rPr lang="zh-TW" altLang="en-US"/>
               <a:t>第五層</a:t>
             </a:r>
+            <a:endParaRPr lang="zh-TW" altLang="en-US"/>
           </a:p>
         </p:txBody>
       </p:sp>
@@ -3263,6 +3195,7 @@
               <a:rPr lang="zh-TW" altLang="en-US"/>
               <a:t>按一下以編輯母片文字樣式</a:t>
             </a:r>
+            <a:endParaRPr lang="zh-TW" altLang="en-US"/>
           </a:p>
         </p:txBody>
       </p:sp>
@@ -3319,6 +3252,7 @@
               <a:rPr lang="zh-TW" altLang="en-US"/>
               <a:t>按一下以編輯母片文字樣式</a:t>
             </a:r>
+            <a:endParaRPr lang="zh-TW" altLang="en-US"/>
           </a:p>
           <a:p>
             <a:pPr lvl="1"/>
@@ -3326,6 +3260,7 @@
               <a:rPr lang="zh-TW" altLang="en-US"/>
               <a:t>第二層</a:t>
             </a:r>
+            <a:endParaRPr lang="zh-TW" altLang="en-US"/>
           </a:p>
           <a:p>
             <a:pPr lvl="2"/>
@@ -3333,6 +3268,7 @@
               <a:rPr lang="zh-TW" altLang="en-US"/>
               <a:t>第三層</a:t>
             </a:r>
+            <a:endParaRPr lang="zh-TW" altLang="en-US"/>
           </a:p>
           <a:p>
             <a:pPr lvl="3"/>
@@ -3340,6 +3276,7 @@
               <a:rPr lang="zh-TW" altLang="en-US"/>
               <a:t>第四層</a:t>
             </a:r>
+            <a:endParaRPr lang="zh-TW" altLang="en-US"/>
           </a:p>
           <a:p>
             <a:pPr lvl="4"/>
@@ -3347,6 +3284,7 @@
               <a:rPr lang="zh-TW" altLang="en-US"/>
               <a:t>第五層</a:t>
             </a:r>
+            <a:endParaRPr lang="zh-TW" altLang="en-US"/>
           </a:p>
         </p:txBody>
       </p:sp>
@@ -3375,7 +3313,6 @@
                   <a:srgbClr val="000000"/>
                 </a:solidFill>
               </a:rPr>
-              <a:t>‹#›</a:t>
             </a:fld>
             <a:endParaRPr lang="en-US" altLang="zh-TW">
               <a:solidFill>
@@ -3429,6 +3366,7 @@
               <a:rPr lang="zh-TW" altLang="en-US"/>
               <a:t>按一下以編輯母片標題樣式</a:t>
             </a:r>
+            <a:endParaRPr lang="zh-TW" altLang="en-US"/>
           </a:p>
         </p:txBody>
       </p:sp>
@@ -3457,7 +3395,6 @@
                   <a:srgbClr val="000000"/>
                 </a:solidFill>
               </a:rPr>
-              <a:t>‹#›</a:t>
             </a:fld>
             <a:endParaRPr lang="en-US" altLang="zh-TW">
               <a:solidFill>
@@ -3517,7 +3454,6 @@
                   <a:srgbClr val="000000"/>
                 </a:solidFill>
               </a:rPr>
-              <a:t>‹#›</a:t>
             </a:fld>
             <a:endParaRPr lang="en-US" altLang="zh-TW">
               <a:solidFill>
@@ -3580,6 +3516,7 @@
               <a:rPr lang="zh-TW" altLang="en-US"/>
               <a:t>按一下以編輯母片標題樣式</a:t>
             </a:r>
+            <a:endParaRPr lang="zh-TW" altLang="en-US"/>
           </a:p>
         </p:txBody>
       </p:sp>
@@ -3636,6 +3573,7 @@
               <a:rPr lang="zh-TW" altLang="en-US" dirty="0"/>
               <a:t>按一下以編輯母片文字樣式</a:t>
             </a:r>
+            <a:endParaRPr lang="zh-TW" altLang="en-US" dirty="0"/>
           </a:p>
           <a:p>
             <a:pPr lvl="1"/>
@@ -3643,6 +3581,7 @@
               <a:rPr lang="zh-TW" altLang="en-US" dirty="0"/>
               <a:t>第二層</a:t>
             </a:r>
+            <a:endParaRPr lang="zh-TW" altLang="en-US" dirty="0"/>
           </a:p>
           <a:p>
             <a:pPr lvl="2"/>
@@ -3650,6 +3589,7 @@
               <a:rPr lang="zh-TW" altLang="en-US" dirty="0"/>
               <a:t>第三層</a:t>
             </a:r>
+            <a:endParaRPr lang="zh-TW" altLang="en-US" dirty="0"/>
           </a:p>
           <a:p>
             <a:pPr lvl="3"/>
@@ -3657,6 +3597,7 @@
               <a:rPr lang="zh-TW" altLang="en-US" dirty="0"/>
               <a:t>第四層</a:t>
             </a:r>
+            <a:endParaRPr lang="zh-TW" altLang="en-US" dirty="0"/>
           </a:p>
           <a:p>
             <a:pPr lvl="4"/>
@@ -3664,6 +3605,7 @@
               <a:rPr lang="zh-TW" altLang="en-US" dirty="0"/>
               <a:t>第五層</a:t>
             </a:r>
+            <a:endParaRPr lang="zh-TW" altLang="en-US" dirty="0"/>
           </a:p>
         </p:txBody>
       </p:sp>
@@ -3729,6 +3671,7 @@
               <a:rPr lang="zh-TW" altLang="en-US"/>
               <a:t>按一下以編輯母片文字樣式</a:t>
             </a:r>
+            <a:endParaRPr lang="zh-TW" altLang="en-US"/>
           </a:p>
         </p:txBody>
       </p:sp>
@@ -3757,7 +3700,6 @@
                   <a:srgbClr val="000000"/>
                 </a:solidFill>
               </a:rPr>
-              <a:t>‹#›</a:t>
             </a:fld>
             <a:endParaRPr lang="en-US" altLang="zh-TW">
               <a:solidFill>
@@ -3811,6 +3753,7 @@
               <a:rPr lang="zh-TW" altLang="en-US"/>
               <a:t>按一下以編輯母片標題樣式</a:t>
             </a:r>
+            <a:endParaRPr lang="zh-TW" altLang="en-US"/>
           </a:p>
         </p:txBody>
       </p:sp>
@@ -3834,6 +3777,7 @@
               <a:rPr lang="zh-TW" altLang="en-US"/>
               <a:t>按一下以編輯母片文字樣式</a:t>
             </a:r>
+            <a:endParaRPr lang="zh-TW" altLang="en-US"/>
           </a:p>
           <a:p>
             <a:pPr lvl="1"/>
@@ -3841,6 +3785,7 @@
               <a:rPr lang="zh-TW" altLang="en-US"/>
               <a:t>第二層</a:t>
             </a:r>
+            <a:endParaRPr lang="zh-TW" altLang="en-US"/>
           </a:p>
           <a:p>
             <a:pPr lvl="2"/>
@@ -3848,6 +3793,7 @@
               <a:rPr lang="zh-TW" altLang="en-US"/>
               <a:t>第三層</a:t>
             </a:r>
+            <a:endParaRPr lang="zh-TW" altLang="en-US"/>
           </a:p>
           <a:p>
             <a:pPr lvl="3"/>
@@ -3855,6 +3801,7 @@
               <a:rPr lang="zh-TW" altLang="en-US"/>
               <a:t>第四層</a:t>
             </a:r>
+            <a:endParaRPr lang="zh-TW" altLang="en-US"/>
           </a:p>
           <a:p>
             <a:pPr lvl="4"/>
@@ -3862,6 +3809,7 @@
               <a:rPr lang="zh-TW" altLang="en-US"/>
               <a:t>第五層</a:t>
             </a:r>
+            <a:endParaRPr lang="zh-TW" altLang="en-US"/>
           </a:p>
         </p:txBody>
       </p:sp>
@@ -3889,7 +3837,6 @@
             </a:pPr>
             <a:fld id="{13824797-BBCB-46D5-B74F-32D725404A6B}" type="slidenum">
               <a:rPr lang="zh-TW" altLang="en-US"/>
-              <a:t>‹#›</a:t>
             </a:fld>
             <a:endParaRPr lang="en-US" altLang="zh-TW"/>
           </a:p>
@@ -4043,6 +3990,7 @@
               <a:rPr lang="zh-TW" altLang="en-US"/>
               <a:t>按一下以編輯母片文字樣式</a:t>
             </a:r>
+            <a:endParaRPr lang="zh-TW" altLang="en-US"/>
           </a:p>
         </p:txBody>
       </p:sp>
@@ -4071,7 +4019,6 @@
                   <a:srgbClr val="000000"/>
                 </a:solidFill>
               </a:rPr>
-              <a:t>‹#›</a:t>
             </a:fld>
             <a:endParaRPr lang="en-US" altLang="zh-TW">
               <a:solidFill>
@@ -4100,6 +4047,7 @@
               <a:rPr lang="zh-TW" altLang="en-US"/>
               <a:t>按一下以編輯母片標題樣式</a:t>
             </a:r>
+            <a:endParaRPr lang="zh-TW" altLang="en-US"/>
           </a:p>
         </p:txBody>
       </p:sp>
@@ -4147,6 +4095,7 @@
               <a:rPr lang="zh-TW" altLang="en-US"/>
               <a:t>按一下以編輯母片標題樣式</a:t>
             </a:r>
+            <a:endParaRPr lang="zh-TW" altLang="en-US"/>
           </a:p>
         </p:txBody>
       </p:sp>
@@ -4170,6 +4119,7 @@
               <a:rPr lang="zh-TW" altLang="en-US"/>
               <a:t>按一下以編輯母片文字樣式</a:t>
             </a:r>
+            <a:endParaRPr lang="zh-TW" altLang="en-US"/>
           </a:p>
           <a:p>
             <a:pPr lvl="1"/>
@@ -4177,6 +4127,7 @@
               <a:rPr lang="zh-TW" altLang="en-US"/>
               <a:t>第二層</a:t>
             </a:r>
+            <a:endParaRPr lang="zh-TW" altLang="en-US"/>
           </a:p>
           <a:p>
             <a:pPr lvl="2"/>
@@ -4184,6 +4135,7 @@
               <a:rPr lang="zh-TW" altLang="en-US"/>
               <a:t>第三層</a:t>
             </a:r>
+            <a:endParaRPr lang="zh-TW" altLang="en-US"/>
           </a:p>
           <a:p>
             <a:pPr lvl="3"/>
@@ -4191,6 +4143,7 @@
               <a:rPr lang="zh-TW" altLang="en-US"/>
               <a:t>第四層</a:t>
             </a:r>
+            <a:endParaRPr lang="zh-TW" altLang="en-US"/>
           </a:p>
           <a:p>
             <a:pPr lvl="4"/>
@@ -4198,6 +4151,7 @@
               <a:rPr lang="zh-TW" altLang="en-US"/>
               <a:t>第五層</a:t>
             </a:r>
+            <a:endParaRPr lang="zh-TW" altLang="en-US"/>
           </a:p>
         </p:txBody>
       </p:sp>
@@ -4226,7 +4180,6 @@
                   <a:srgbClr val="000000"/>
                 </a:solidFill>
               </a:rPr>
-              <a:t>‹#›</a:t>
             </a:fld>
             <a:endParaRPr lang="en-US" altLang="zh-TW">
               <a:solidFill>
@@ -4285,6 +4238,7 @@
               <a:rPr lang="zh-TW" altLang="en-US"/>
               <a:t>按一下以編輯母片標題樣式</a:t>
             </a:r>
+            <a:endParaRPr lang="zh-TW" altLang="en-US"/>
           </a:p>
         </p:txBody>
       </p:sp>
@@ -4313,6 +4267,7 @@
               <a:rPr lang="zh-TW" altLang="en-US"/>
               <a:t>按一下以編輯母片文字樣式</a:t>
             </a:r>
+            <a:endParaRPr lang="zh-TW" altLang="en-US"/>
           </a:p>
           <a:p>
             <a:pPr lvl="1"/>
@@ -4320,6 +4275,7 @@
               <a:rPr lang="zh-TW" altLang="en-US"/>
               <a:t>第二層</a:t>
             </a:r>
+            <a:endParaRPr lang="zh-TW" altLang="en-US"/>
           </a:p>
           <a:p>
             <a:pPr lvl="2"/>
@@ -4327,6 +4283,7 @@
               <a:rPr lang="zh-TW" altLang="en-US"/>
               <a:t>第三層</a:t>
             </a:r>
+            <a:endParaRPr lang="zh-TW" altLang="en-US"/>
           </a:p>
           <a:p>
             <a:pPr lvl="3"/>
@@ -4334,6 +4291,7 @@
               <a:rPr lang="zh-TW" altLang="en-US"/>
               <a:t>第四層</a:t>
             </a:r>
+            <a:endParaRPr lang="zh-TW" altLang="en-US"/>
           </a:p>
           <a:p>
             <a:pPr lvl="4"/>
@@ -4341,6 +4299,7 @@
               <a:rPr lang="zh-TW" altLang="en-US"/>
               <a:t>第五層</a:t>
             </a:r>
+            <a:endParaRPr lang="zh-TW" altLang="en-US"/>
           </a:p>
         </p:txBody>
       </p:sp>
@@ -4369,7 +4328,6 @@
                   <a:srgbClr val="000000"/>
                 </a:solidFill>
               </a:rPr>
-              <a:t>‹#›</a:t>
             </a:fld>
             <a:endParaRPr lang="en-US" altLang="zh-TW">
               <a:solidFill>
@@ -4428,6 +4386,7 @@
               <a:rPr lang="zh-TW" altLang="en-US"/>
               <a:t>按一下以編輯母片標題樣式</a:t>
             </a:r>
+            <a:endParaRPr lang="zh-TW" altLang="en-US"/>
           </a:p>
         </p:txBody>
       </p:sp>
@@ -4546,6 +4505,7 @@
               <a:rPr lang="zh-TW" altLang="en-US"/>
               <a:t>按一下以編輯母片副標題樣式</a:t>
             </a:r>
+            <a:endParaRPr lang="zh-TW" altLang="en-US"/>
           </a:p>
         </p:txBody>
       </p:sp>
@@ -4566,7 +4526,6 @@
           <a:p>
             <a:fld id="{388997FB-EFBE-4ED6-A43F-DDA1512FD57C}" type="datetimeFigureOut">
               <a:rPr lang="zh-TW" altLang="en-US" smtClean="0"/>
-              <a:t>2026/4/30</a:t>
             </a:fld>
             <a:endParaRPr lang="zh-TW" altLang="en-US"/>
           </a:p>
@@ -4608,7 +4567,6 @@
           <a:p>
             <a:fld id="{13C0E97A-62D1-41C7-936F-199E295F9AB2}" type="slidenum">
               <a:rPr lang="zh-TW" altLang="en-US" smtClean="0"/>
-              <a:t>‹#›</a:t>
             </a:fld>
             <a:endParaRPr lang="zh-TW" altLang="en-US"/>
           </a:p>
@@ -4658,6 +4616,7 @@
               <a:rPr lang="zh-TW" altLang="en-US"/>
               <a:t>按一下以編輯母片標題樣式</a:t>
             </a:r>
+            <a:endParaRPr lang="zh-TW" altLang="en-US"/>
           </a:p>
         </p:txBody>
       </p:sp>
@@ -4681,6 +4640,7 @@
               <a:rPr lang="zh-TW" altLang="en-US"/>
               <a:t>按一下以編輯母片文字樣式</a:t>
             </a:r>
+            <a:endParaRPr lang="zh-TW" altLang="en-US"/>
           </a:p>
           <a:p>
             <a:pPr lvl="1"/>
@@ -4688,6 +4648,7 @@
               <a:rPr lang="zh-TW" altLang="en-US"/>
               <a:t>第二層</a:t>
             </a:r>
+            <a:endParaRPr lang="zh-TW" altLang="en-US"/>
           </a:p>
           <a:p>
             <a:pPr lvl="2"/>
@@ -4695,6 +4656,7 @@
               <a:rPr lang="zh-TW" altLang="en-US"/>
               <a:t>第三層</a:t>
             </a:r>
+            <a:endParaRPr lang="zh-TW" altLang="en-US"/>
           </a:p>
           <a:p>
             <a:pPr lvl="3"/>
@@ -4702,6 +4664,7 @@
               <a:rPr lang="zh-TW" altLang="en-US"/>
               <a:t>第四層</a:t>
             </a:r>
+            <a:endParaRPr lang="zh-TW" altLang="en-US"/>
           </a:p>
           <a:p>
             <a:pPr lvl="4"/>
@@ -4709,6 +4672,7 @@
               <a:rPr lang="zh-TW" altLang="en-US"/>
               <a:t>第五層</a:t>
             </a:r>
+            <a:endParaRPr lang="zh-TW" altLang="en-US"/>
           </a:p>
         </p:txBody>
       </p:sp>
@@ -4729,7 +4693,6 @@
           <a:p>
             <a:fld id="{388997FB-EFBE-4ED6-A43F-DDA1512FD57C}" type="datetimeFigureOut">
               <a:rPr lang="zh-TW" altLang="en-US" smtClean="0"/>
-              <a:t>2026/4/30</a:t>
             </a:fld>
             <a:endParaRPr lang="zh-TW" altLang="en-US"/>
           </a:p>
@@ -4771,7 +4734,6 @@
           <a:p>
             <a:fld id="{13C0E97A-62D1-41C7-936F-199E295F9AB2}" type="slidenum">
               <a:rPr lang="zh-TW" altLang="en-US" smtClean="0"/>
-              <a:t>‹#›</a:t>
             </a:fld>
             <a:endParaRPr lang="zh-TW" altLang="en-US"/>
           </a:p>
@@ -4830,6 +4792,7 @@
               <a:rPr lang="zh-TW" altLang="en-US"/>
               <a:t>按一下以編輯母片標題樣式</a:t>
             </a:r>
+            <a:endParaRPr lang="zh-TW" altLang="en-US"/>
           </a:p>
         </p:txBody>
       </p:sp>
@@ -4949,6 +4912,7 @@
               <a:rPr lang="zh-TW" altLang="en-US"/>
               <a:t>按一下以編輯母片文字樣式</a:t>
             </a:r>
+            <a:endParaRPr lang="zh-TW" altLang="en-US"/>
           </a:p>
         </p:txBody>
       </p:sp>
@@ -4969,7 +4933,6 @@
           <a:p>
             <a:fld id="{388997FB-EFBE-4ED6-A43F-DDA1512FD57C}" type="datetimeFigureOut">
               <a:rPr lang="zh-TW" altLang="en-US" smtClean="0"/>
-              <a:t>2026/4/30</a:t>
             </a:fld>
             <a:endParaRPr lang="zh-TW" altLang="en-US"/>
           </a:p>
@@ -5011,7 +4974,6 @@
           <a:p>
             <a:fld id="{13C0E97A-62D1-41C7-936F-199E295F9AB2}" type="slidenum">
               <a:rPr lang="zh-TW" altLang="en-US" smtClean="0"/>
-              <a:t>‹#›</a:t>
             </a:fld>
             <a:endParaRPr lang="zh-TW" altLang="en-US"/>
           </a:p>
@@ -5061,6 +5023,7 @@
               <a:rPr lang="zh-TW" altLang="en-US"/>
               <a:t>按一下以編輯母片標題樣式</a:t>
             </a:r>
+            <a:endParaRPr lang="zh-TW" altLang="en-US"/>
           </a:p>
         </p:txBody>
       </p:sp>
@@ -5117,6 +5080,7 @@
               <a:rPr lang="zh-TW" altLang="en-US"/>
               <a:t>按一下以編輯母片文字樣式</a:t>
             </a:r>
+            <a:endParaRPr lang="zh-TW" altLang="en-US"/>
           </a:p>
           <a:p>
             <a:pPr lvl="1"/>
@@ -5124,6 +5088,7 @@
               <a:rPr lang="zh-TW" altLang="en-US"/>
               <a:t>第二層</a:t>
             </a:r>
+            <a:endParaRPr lang="zh-TW" altLang="en-US"/>
           </a:p>
           <a:p>
             <a:pPr lvl="2"/>
@@ -5131,6 +5096,7 @@
               <a:rPr lang="zh-TW" altLang="en-US"/>
               <a:t>第三層</a:t>
             </a:r>
+            <a:endParaRPr lang="zh-TW" altLang="en-US"/>
           </a:p>
           <a:p>
             <a:pPr lvl="3"/>
@@ -5138,6 +5104,7 @@
               <a:rPr lang="zh-TW" altLang="en-US"/>
               <a:t>第四層</a:t>
             </a:r>
+            <a:endParaRPr lang="zh-TW" altLang="en-US"/>
           </a:p>
           <a:p>
             <a:pPr lvl="4"/>
@@ -5145,6 +5112,7 @@
               <a:rPr lang="zh-TW" altLang="en-US"/>
               <a:t>第五層</a:t>
             </a:r>
+            <a:endParaRPr lang="zh-TW" altLang="en-US"/>
           </a:p>
         </p:txBody>
       </p:sp>
@@ -5201,6 +5169,7 @@
               <a:rPr lang="zh-TW" altLang="en-US"/>
               <a:t>按一下以編輯母片文字樣式</a:t>
             </a:r>
+            <a:endParaRPr lang="zh-TW" altLang="en-US"/>
           </a:p>
           <a:p>
             <a:pPr lvl="1"/>
@@ -5208,6 +5177,7 @@
               <a:rPr lang="zh-TW" altLang="en-US"/>
               <a:t>第二層</a:t>
             </a:r>
+            <a:endParaRPr lang="zh-TW" altLang="en-US"/>
           </a:p>
           <a:p>
             <a:pPr lvl="2"/>
@@ -5215,6 +5185,7 @@
               <a:rPr lang="zh-TW" altLang="en-US"/>
               <a:t>第三層</a:t>
             </a:r>
+            <a:endParaRPr lang="zh-TW" altLang="en-US"/>
           </a:p>
           <a:p>
             <a:pPr lvl="3"/>
@@ -5222,6 +5193,7 @@
               <a:rPr lang="zh-TW" altLang="en-US"/>
               <a:t>第四層</a:t>
             </a:r>
+            <a:endParaRPr lang="zh-TW" altLang="en-US"/>
           </a:p>
           <a:p>
             <a:pPr lvl="4"/>
@@ -5229,6 +5201,7 @@
               <a:rPr lang="zh-TW" altLang="en-US"/>
               <a:t>第五層</a:t>
             </a:r>
+            <a:endParaRPr lang="zh-TW" altLang="en-US"/>
           </a:p>
         </p:txBody>
       </p:sp>
@@ -5249,7 +5222,6 @@
           <a:p>
             <a:fld id="{388997FB-EFBE-4ED6-A43F-DDA1512FD57C}" type="datetimeFigureOut">
               <a:rPr lang="zh-TW" altLang="en-US" smtClean="0"/>
-              <a:t>2026/4/30</a:t>
             </a:fld>
             <a:endParaRPr lang="zh-TW" altLang="en-US"/>
           </a:p>
@@ -5291,7 +5263,6 @@
           <a:p>
             <a:fld id="{13C0E97A-62D1-41C7-936F-199E295F9AB2}" type="slidenum">
               <a:rPr lang="zh-TW" altLang="en-US" smtClean="0"/>
-              <a:t>‹#›</a:t>
             </a:fld>
             <a:endParaRPr lang="zh-TW" altLang="en-US"/>
           </a:p>
@@ -5345,6 +5316,7 @@
               <a:rPr lang="zh-TW" altLang="en-US"/>
               <a:t>按一下以編輯母片標題樣式</a:t>
             </a:r>
+            <a:endParaRPr lang="zh-TW" altLang="en-US"/>
           </a:p>
         </p:txBody>
       </p:sp>
@@ -5410,6 +5382,7 @@
               <a:rPr lang="zh-TW" altLang="en-US"/>
               <a:t>按一下以編輯母片文字樣式</a:t>
             </a:r>
+            <a:endParaRPr lang="zh-TW" altLang="en-US"/>
           </a:p>
         </p:txBody>
       </p:sp>
@@ -5466,6 +5439,7 @@
               <a:rPr lang="zh-TW" altLang="en-US"/>
               <a:t>按一下以編輯母片文字樣式</a:t>
             </a:r>
+            <a:endParaRPr lang="zh-TW" altLang="en-US"/>
           </a:p>
           <a:p>
             <a:pPr lvl="1"/>
@@ -5473,6 +5447,7 @@
               <a:rPr lang="zh-TW" altLang="en-US"/>
               <a:t>第二層</a:t>
             </a:r>
+            <a:endParaRPr lang="zh-TW" altLang="en-US"/>
           </a:p>
           <a:p>
             <a:pPr lvl="2"/>
@@ -5480,6 +5455,7 @@
               <a:rPr lang="zh-TW" altLang="en-US"/>
               <a:t>第三層</a:t>
             </a:r>
+            <a:endParaRPr lang="zh-TW" altLang="en-US"/>
           </a:p>
           <a:p>
             <a:pPr lvl="3"/>
@@ -5487,6 +5463,7 @@
               <a:rPr lang="zh-TW" altLang="en-US"/>
               <a:t>第四層</a:t>
             </a:r>
+            <a:endParaRPr lang="zh-TW" altLang="en-US"/>
           </a:p>
           <a:p>
             <a:pPr lvl="4"/>
@@ -5494,6 +5471,7 @@
               <a:rPr lang="zh-TW" altLang="en-US"/>
               <a:t>第五層</a:t>
             </a:r>
+            <a:endParaRPr lang="zh-TW" altLang="en-US"/>
           </a:p>
         </p:txBody>
       </p:sp>
@@ -5559,6 +5537,7 @@
               <a:rPr lang="zh-TW" altLang="en-US"/>
               <a:t>按一下以編輯母片文字樣式</a:t>
             </a:r>
+            <a:endParaRPr lang="zh-TW" altLang="en-US"/>
           </a:p>
         </p:txBody>
       </p:sp>
@@ -5615,6 +5594,7 @@
               <a:rPr lang="zh-TW" altLang="en-US"/>
               <a:t>按一下以編輯母片文字樣式</a:t>
             </a:r>
+            <a:endParaRPr lang="zh-TW" altLang="en-US"/>
           </a:p>
           <a:p>
             <a:pPr lvl="1"/>
@@ -5622,6 +5602,7 @@
               <a:rPr lang="zh-TW" altLang="en-US"/>
               <a:t>第二層</a:t>
             </a:r>
+            <a:endParaRPr lang="zh-TW" altLang="en-US"/>
           </a:p>
           <a:p>
             <a:pPr lvl="2"/>
@@ -5629,6 +5610,7 @@
               <a:rPr lang="zh-TW" altLang="en-US"/>
               <a:t>第三層</a:t>
             </a:r>
+            <a:endParaRPr lang="zh-TW" altLang="en-US"/>
           </a:p>
           <a:p>
             <a:pPr lvl="3"/>
@@ -5636,6 +5618,7 @@
               <a:rPr lang="zh-TW" altLang="en-US"/>
               <a:t>第四層</a:t>
             </a:r>
+            <a:endParaRPr lang="zh-TW" altLang="en-US"/>
           </a:p>
           <a:p>
             <a:pPr lvl="4"/>
@@ -5643,6 +5626,7 @@
               <a:rPr lang="zh-TW" altLang="en-US"/>
               <a:t>第五層</a:t>
             </a:r>
+            <a:endParaRPr lang="zh-TW" altLang="en-US"/>
           </a:p>
         </p:txBody>
       </p:sp>
@@ -5663,7 +5647,6 @@
           <a:p>
             <a:fld id="{388997FB-EFBE-4ED6-A43F-DDA1512FD57C}" type="datetimeFigureOut">
               <a:rPr lang="zh-TW" altLang="en-US" smtClean="0"/>
-              <a:t>2026/4/30</a:t>
             </a:fld>
             <a:endParaRPr lang="zh-TW" altLang="en-US"/>
           </a:p>
@@ -5705,7 +5688,6 @@
           <a:p>
             <a:fld id="{13C0E97A-62D1-41C7-936F-199E295F9AB2}" type="slidenum">
               <a:rPr lang="zh-TW" altLang="en-US" smtClean="0"/>
-              <a:t>‹#›</a:t>
             </a:fld>
             <a:endParaRPr lang="zh-TW" altLang="en-US"/>
           </a:p>
@@ -5755,6 +5737,7 @@
               <a:rPr lang="zh-TW" altLang="en-US"/>
               <a:t>按一下以編輯母片標題樣式</a:t>
             </a:r>
+            <a:endParaRPr lang="zh-TW" altLang="en-US"/>
           </a:p>
         </p:txBody>
       </p:sp>
@@ -5775,7 +5758,6 @@
           <a:p>
             <a:fld id="{388997FB-EFBE-4ED6-A43F-DDA1512FD57C}" type="datetimeFigureOut">
               <a:rPr lang="zh-TW" altLang="en-US" smtClean="0"/>
-              <a:t>2026/4/30</a:t>
             </a:fld>
             <a:endParaRPr lang="zh-TW" altLang="en-US"/>
           </a:p>
@@ -5817,7 +5799,6 @@
           <a:p>
             <a:fld id="{13C0E97A-62D1-41C7-936F-199E295F9AB2}" type="slidenum">
               <a:rPr lang="zh-TW" altLang="en-US" smtClean="0"/>
-              <a:t>‹#›</a:t>
             </a:fld>
             <a:endParaRPr lang="zh-TW" altLang="en-US"/>
           </a:p>
@@ -5865,7 +5846,6 @@
           <a:p>
             <a:fld id="{388997FB-EFBE-4ED6-A43F-DDA1512FD57C}" type="datetimeFigureOut">
               <a:rPr lang="zh-TW" altLang="en-US" smtClean="0"/>
-              <a:t>2026/4/30</a:t>
             </a:fld>
             <a:endParaRPr lang="zh-TW" altLang="en-US"/>
           </a:p>
@@ -5907,7 +5887,6 @@
           <a:p>
             <a:fld id="{13C0E97A-62D1-41C7-936F-199E295F9AB2}" type="slidenum">
               <a:rPr lang="zh-TW" altLang="en-US" smtClean="0"/>
-              <a:t>‹#›</a:t>
             </a:fld>
             <a:endParaRPr lang="zh-TW" altLang="en-US"/>
           </a:p>
@@ -5966,6 +5945,7 @@
               <a:rPr lang="zh-TW" altLang="en-US"/>
               <a:t>按一下以編輯母片標題樣式</a:t>
             </a:r>
+            <a:endParaRPr lang="zh-TW" altLang="en-US"/>
           </a:p>
         </p:txBody>
       </p:sp>
@@ -6031,6 +6011,7 @@
               <a:rPr lang="zh-TW" altLang="en-US"/>
               <a:t>按一下以編輯母片文字樣式</a:t>
             </a:r>
+            <a:endParaRPr lang="zh-TW" altLang="en-US"/>
           </a:p>
         </p:txBody>
       </p:sp>
@@ -6058,7 +6039,6 @@
             </a:pPr>
             <a:fld id="{B13CE306-2D5A-4AB4-AC5D-5D21E1944430}" type="slidenum">
               <a:rPr lang="zh-TW" altLang="en-US"/>
-              <a:t>‹#›</a:t>
             </a:fld>
             <a:endParaRPr lang="en-US" altLang="zh-TW"/>
           </a:p>
@@ -6117,6 +6097,7 @@
               <a:rPr lang="zh-TW" altLang="en-US"/>
               <a:t>按一下以編輯母片標題樣式</a:t>
             </a:r>
+            <a:endParaRPr lang="zh-TW" altLang="en-US"/>
           </a:p>
         </p:txBody>
       </p:sp>
@@ -6173,6 +6154,7 @@
               <a:rPr lang="zh-TW" altLang="en-US"/>
               <a:t>按一下以編輯母片文字樣式</a:t>
             </a:r>
+            <a:endParaRPr lang="zh-TW" altLang="en-US"/>
           </a:p>
           <a:p>
             <a:pPr lvl="1"/>
@@ -6180,6 +6162,7 @@
               <a:rPr lang="zh-TW" altLang="en-US"/>
               <a:t>第二層</a:t>
             </a:r>
+            <a:endParaRPr lang="zh-TW" altLang="en-US"/>
           </a:p>
           <a:p>
             <a:pPr lvl="2"/>
@@ -6187,6 +6170,7 @@
               <a:rPr lang="zh-TW" altLang="en-US"/>
               <a:t>第三層</a:t>
             </a:r>
+            <a:endParaRPr lang="zh-TW" altLang="en-US"/>
           </a:p>
           <a:p>
             <a:pPr lvl="3"/>
@@ -6194,6 +6178,7 @@
               <a:rPr lang="zh-TW" altLang="en-US"/>
               <a:t>第四層</a:t>
             </a:r>
+            <a:endParaRPr lang="zh-TW" altLang="en-US"/>
           </a:p>
           <a:p>
             <a:pPr lvl="4"/>
@@ -6201,6 +6186,7 @@
               <a:rPr lang="zh-TW" altLang="en-US"/>
               <a:t>第五層</a:t>
             </a:r>
+            <a:endParaRPr lang="zh-TW" altLang="en-US"/>
           </a:p>
         </p:txBody>
       </p:sp>
@@ -6266,6 +6252,7 @@
               <a:rPr lang="zh-TW" altLang="en-US"/>
               <a:t>按一下以編輯母片文字樣式</a:t>
             </a:r>
+            <a:endParaRPr lang="zh-TW" altLang="en-US"/>
           </a:p>
         </p:txBody>
       </p:sp>
@@ -6286,7 +6273,6 @@
           <a:p>
             <a:fld id="{388997FB-EFBE-4ED6-A43F-DDA1512FD57C}" type="datetimeFigureOut">
               <a:rPr lang="zh-TW" altLang="en-US" smtClean="0"/>
-              <a:t>2026/4/30</a:t>
             </a:fld>
             <a:endParaRPr lang="zh-TW" altLang="en-US"/>
           </a:p>
@@ -6328,7 +6314,6 @@
           <a:p>
             <a:fld id="{13C0E97A-62D1-41C7-936F-199E295F9AB2}" type="slidenum">
               <a:rPr lang="zh-TW" altLang="en-US" smtClean="0"/>
-              <a:t>‹#›</a:t>
             </a:fld>
             <a:endParaRPr lang="zh-TW" altLang="en-US"/>
           </a:p>
@@ -6387,6 +6372,7 @@
               <a:rPr lang="zh-TW" altLang="en-US"/>
               <a:t>按一下以編輯母片標題樣式</a:t>
             </a:r>
+            <a:endParaRPr lang="zh-TW" altLang="en-US"/>
           </a:p>
         </p:txBody>
       </p:sp>
@@ -6513,6 +6499,7 @@
               <a:rPr lang="zh-TW" altLang="en-US"/>
               <a:t>按一下以編輯母片文字樣式</a:t>
             </a:r>
+            <a:endParaRPr lang="zh-TW" altLang="en-US"/>
           </a:p>
         </p:txBody>
       </p:sp>
@@ -6533,7 +6520,6 @@
           <a:p>
             <a:fld id="{388997FB-EFBE-4ED6-A43F-DDA1512FD57C}" type="datetimeFigureOut">
               <a:rPr lang="zh-TW" altLang="en-US" smtClean="0"/>
-              <a:t>2026/4/30</a:t>
             </a:fld>
             <a:endParaRPr lang="zh-TW" altLang="en-US"/>
           </a:p>
@@ -6575,7 +6561,6 @@
           <a:p>
             <a:fld id="{13C0E97A-62D1-41C7-936F-199E295F9AB2}" type="slidenum">
               <a:rPr lang="zh-TW" altLang="en-US" smtClean="0"/>
-              <a:t>‹#›</a:t>
             </a:fld>
             <a:endParaRPr lang="zh-TW" altLang="en-US"/>
           </a:p>
@@ -6625,6 +6610,7 @@
               <a:rPr lang="zh-TW" altLang="en-US"/>
               <a:t>按一下以編輯母片標題樣式</a:t>
             </a:r>
+            <a:endParaRPr lang="zh-TW" altLang="en-US"/>
           </a:p>
         </p:txBody>
       </p:sp>
@@ -6648,6 +6634,7 @@
               <a:rPr lang="zh-TW" altLang="en-US"/>
               <a:t>按一下以編輯母片文字樣式</a:t>
             </a:r>
+            <a:endParaRPr lang="zh-TW" altLang="en-US"/>
           </a:p>
           <a:p>
             <a:pPr lvl="1"/>
@@ -6655,6 +6642,7 @@
               <a:rPr lang="zh-TW" altLang="en-US"/>
               <a:t>第二層</a:t>
             </a:r>
+            <a:endParaRPr lang="zh-TW" altLang="en-US"/>
           </a:p>
           <a:p>
             <a:pPr lvl="2"/>
@@ -6662,6 +6650,7 @@
               <a:rPr lang="zh-TW" altLang="en-US"/>
               <a:t>第三層</a:t>
             </a:r>
+            <a:endParaRPr lang="zh-TW" altLang="en-US"/>
           </a:p>
           <a:p>
             <a:pPr lvl="3"/>
@@ -6669,6 +6658,7 @@
               <a:rPr lang="zh-TW" altLang="en-US"/>
               <a:t>第四層</a:t>
             </a:r>
+            <a:endParaRPr lang="zh-TW" altLang="en-US"/>
           </a:p>
           <a:p>
             <a:pPr lvl="4"/>
@@ -6676,6 +6666,7 @@
               <a:rPr lang="zh-TW" altLang="en-US"/>
               <a:t>第五層</a:t>
             </a:r>
+            <a:endParaRPr lang="zh-TW" altLang="en-US"/>
           </a:p>
         </p:txBody>
       </p:sp>
@@ -6696,7 +6687,6 @@
           <a:p>
             <a:fld id="{388997FB-EFBE-4ED6-A43F-DDA1512FD57C}" type="datetimeFigureOut">
               <a:rPr lang="zh-TW" altLang="en-US" smtClean="0"/>
-              <a:t>2026/4/30</a:t>
             </a:fld>
             <a:endParaRPr lang="zh-TW" altLang="en-US"/>
           </a:p>
@@ -6738,7 +6728,6 @@
           <a:p>
             <a:fld id="{13C0E97A-62D1-41C7-936F-199E295F9AB2}" type="slidenum">
               <a:rPr lang="zh-TW" altLang="en-US" smtClean="0"/>
-              <a:t>‹#›</a:t>
             </a:fld>
             <a:endParaRPr lang="zh-TW" altLang="en-US"/>
           </a:p>
@@ -6793,6 +6782,7 @@
               <a:rPr lang="zh-TW" altLang="en-US"/>
               <a:t>按一下以編輯母片標題樣式</a:t>
             </a:r>
+            <a:endParaRPr lang="zh-TW" altLang="en-US"/>
           </a:p>
         </p:txBody>
       </p:sp>
@@ -6821,6 +6811,7 @@
               <a:rPr lang="zh-TW" altLang="en-US"/>
               <a:t>按一下以編輯母片文字樣式</a:t>
             </a:r>
+            <a:endParaRPr lang="zh-TW" altLang="en-US"/>
           </a:p>
           <a:p>
             <a:pPr lvl="1"/>
@@ -6828,6 +6819,7 @@
               <a:rPr lang="zh-TW" altLang="en-US"/>
               <a:t>第二層</a:t>
             </a:r>
+            <a:endParaRPr lang="zh-TW" altLang="en-US"/>
           </a:p>
           <a:p>
             <a:pPr lvl="2"/>
@@ -6835,6 +6827,7 @@
               <a:rPr lang="zh-TW" altLang="en-US"/>
               <a:t>第三層</a:t>
             </a:r>
+            <a:endParaRPr lang="zh-TW" altLang="en-US"/>
           </a:p>
           <a:p>
             <a:pPr lvl="3"/>
@@ -6842,6 +6835,7 @@
               <a:rPr lang="zh-TW" altLang="en-US"/>
               <a:t>第四層</a:t>
             </a:r>
+            <a:endParaRPr lang="zh-TW" altLang="en-US"/>
           </a:p>
           <a:p>
             <a:pPr lvl="4"/>
@@ -6849,6 +6843,7 @@
               <a:rPr lang="zh-TW" altLang="en-US"/>
               <a:t>第五層</a:t>
             </a:r>
+            <a:endParaRPr lang="zh-TW" altLang="en-US"/>
           </a:p>
         </p:txBody>
       </p:sp>
@@ -6869,7 +6864,6 @@
           <a:p>
             <a:fld id="{388997FB-EFBE-4ED6-A43F-DDA1512FD57C}" type="datetimeFigureOut">
               <a:rPr lang="zh-TW" altLang="en-US" smtClean="0"/>
-              <a:t>2026/4/30</a:t>
             </a:fld>
             <a:endParaRPr lang="zh-TW" altLang="en-US"/>
           </a:p>
@@ -6911,7 +6905,6 @@
           <a:p>
             <a:fld id="{13C0E97A-62D1-41C7-936F-199E295F9AB2}" type="slidenum">
               <a:rPr lang="zh-TW" altLang="en-US" smtClean="0"/>
-              <a:t>‹#›</a:t>
             </a:fld>
             <a:endParaRPr lang="zh-TW" altLang="en-US"/>
           </a:p>
@@ -6966,6 +6959,7 @@
               <a:rPr lang="zh-TW" altLang="en-US"/>
               <a:t>按一下以編輯母片標題樣式</a:t>
             </a:r>
+            <a:endParaRPr lang="zh-TW" altLang="en-US"/>
           </a:p>
         </p:txBody>
       </p:sp>
@@ -7030,6 +7024,7 @@
               <a:rPr lang="zh-TW" altLang="en-US"/>
               <a:t>按一下以編輯母片副標題樣式</a:t>
             </a:r>
+            <a:endParaRPr lang="zh-TW" altLang="en-US"/>
           </a:p>
         </p:txBody>
       </p:sp>
@@ -7061,7 +7056,6 @@
                   <a:srgbClr val="000000"/>
                 </a:solidFill>
               </a:rPr>
-              <a:t>‹#›</a:t>
             </a:fld>
             <a:endParaRPr lang="en-US" altLang="zh-TW">
               <a:solidFill>
@@ -7115,6 +7109,7 @@
               <a:rPr lang="zh-TW" altLang="en-US"/>
               <a:t>按一下以編輯母片標題樣式</a:t>
             </a:r>
+            <a:endParaRPr lang="zh-TW" altLang="en-US"/>
           </a:p>
         </p:txBody>
       </p:sp>
@@ -7138,6 +7133,7 @@
               <a:rPr lang="zh-TW" altLang="en-US"/>
               <a:t>按一下以編輯母片文字樣式</a:t>
             </a:r>
+            <a:endParaRPr lang="zh-TW" altLang="en-US"/>
           </a:p>
           <a:p>
             <a:pPr lvl="1"/>
@@ -7145,6 +7141,7 @@
               <a:rPr lang="zh-TW" altLang="en-US"/>
               <a:t>第二層</a:t>
             </a:r>
+            <a:endParaRPr lang="zh-TW" altLang="en-US"/>
           </a:p>
           <a:p>
             <a:pPr lvl="2"/>
@@ -7152,6 +7149,7 @@
               <a:rPr lang="zh-TW" altLang="en-US"/>
               <a:t>第三層</a:t>
             </a:r>
+            <a:endParaRPr lang="zh-TW" altLang="en-US"/>
           </a:p>
           <a:p>
             <a:pPr lvl="3"/>
@@ -7159,6 +7157,7 @@
               <a:rPr lang="zh-TW" altLang="en-US"/>
               <a:t>第四層</a:t>
             </a:r>
+            <a:endParaRPr lang="zh-TW" altLang="en-US"/>
           </a:p>
           <a:p>
             <a:pPr lvl="4"/>
@@ -7166,6 +7165,7 @@
               <a:rPr lang="zh-TW" altLang="en-US"/>
               <a:t>第五層</a:t>
             </a:r>
+            <a:endParaRPr lang="zh-TW" altLang="en-US"/>
           </a:p>
         </p:txBody>
       </p:sp>
@@ -7197,7 +7197,6 @@
                   <a:srgbClr val="000000"/>
                 </a:solidFill>
               </a:rPr>
-              <a:t>‹#›</a:t>
             </a:fld>
             <a:endParaRPr lang="en-US" altLang="zh-TW">
               <a:solidFill>
@@ -7260,6 +7259,7 @@
               <a:rPr lang="zh-TW" altLang="en-US"/>
               <a:t>按一下以編輯母片標題樣式</a:t>
             </a:r>
+            <a:endParaRPr lang="zh-TW" altLang="en-US"/>
           </a:p>
         </p:txBody>
       </p:sp>
@@ -7325,6 +7325,7 @@
               <a:rPr lang="zh-TW" altLang="en-US"/>
               <a:t>按一下以編輯母片文字樣式</a:t>
             </a:r>
+            <a:endParaRPr lang="zh-TW" altLang="en-US"/>
           </a:p>
         </p:txBody>
       </p:sp>
@@ -7356,7 +7357,6 @@
                   <a:srgbClr val="000000"/>
                 </a:solidFill>
               </a:rPr>
-              <a:t>‹#›</a:t>
             </a:fld>
             <a:endParaRPr lang="en-US" altLang="zh-TW">
               <a:solidFill>
@@ -7410,6 +7410,7 @@
               <a:rPr lang="zh-TW" altLang="en-US"/>
               <a:t>按一下以編輯母片標題樣式</a:t>
             </a:r>
+            <a:endParaRPr lang="zh-TW" altLang="en-US"/>
           </a:p>
         </p:txBody>
       </p:sp>
@@ -7466,6 +7467,7 @@
               <a:rPr lang="zh-TW" altLang="en-US"/>
               <a:t>按一下以編輯母片文字樣式</a:t>
             </a:r>
+            <a:endParaRPr lang="zh-TW" altLang="en-US"/>
           </a:p>
           <a:p>
             <a:pPr lvl="1"/>
@@ -7473,6 +7475,7 @@
               <a:rPr lang="zh-TW" altLang="en-US"/>
               <a:t>第二層</a:t>
             </a:r>
+            <a:endParaRPr lang="zh-TW" altLang="en-US"/>
           </a:p>
           <a:p>
             <a:pPr lvl="2"/>
@@ -7480,6 +7483,7 @@
               <a:rPr lang="zh-TW" altLang="en-US"/>
               <a:t>第三層</a:t>
             </a:r>
+            <a:endParaRPr lang="zh-TW" altLang="en-US"/>
           </a:p>
           <a:p>
             <a:pPr lvl="3"/>
@@ -7487,6 +7491,7 @@
               <a:rPr lang="zh-TW" altLang="en-US"/>
               <a:t>第四層</a:t>
             </a:r>
+            <a:endParaRPr lang="zh-TW" altLang="en-US"/>
           </a:p>
           <a:p>
             <a:pPr lvl="4"/>
@@ -7494,6 +7499,7 @@
               <a:rPr lang="zh-TW" altLang="en-US"/>
               <a:t>第五層</a:t>
             </a:r>
+            <a:endParaRPr lang="zh-TW" altLang="en-US"/>
           </a:p>
         </p:txBody>
       </p:sp>
@@ -7550,6 +7556,7 @@
               <a:rPr lang="zh-TW" altLang="en-US"/>
               <a:t>按一下以編輯母片文字樣式</a:t>
             </a:r>
+            <a:endParaRPr lang="zh-TW" altLang="en-US"/>
           </a:p>
           <a:p>
             <a:pPr lvl="1"/>
@@ -7557,6 +7564,7 @@
               <a:rPr lang="zh-TW" altLang="en-US"/>
               <a:t>第二層</a:t>
             </a:r>
+            <a:endParaRPr lang="zh-TW" altLang="en-US"/>
           </a:p>
           <a:p>
             <a:pPr lvl="2"/>
@@ -7564,6 +7572,7 @@
               <a:rPr lang="zh-TW" altLang="en-US"/>
               <a:t>第三層</a:t>
             </a:r>
+            <a:endParaRPr lang="zh-TW" altLang="en-US"/>
           </a:p>
           <a:p>
             <a:pPr lvl="3"/>
@@ -7571,6 +7580,7 @@
               <a:rPr lang="zh-TW" altLang="en-US"/>
               <a:t>第四層</a:t>
             </a:r>
+            <a:endParaRPr lang="zh-TW" altLang="en-US"/>
           </a:p>
           <a:p>
             <a:pPr lvl="4"/>
@@ -7578,6 +7588,7 @@
               <a:rPr lang="zh-TW" altLang="en-US"/>
               <a:t>第五層</a:t>
             </a:r>
+            <a:endParaRPr lang="zh-TW" altLang="en-US"/>
           </a:p>
         </p:txBody>
       </p:sp>
@@ -7609,7 +7620,6 @@
                   <a:srgbClr val="000000"/>
                 </a:solidFill>
               </a:rPr>
-              <a:t>‹#›</a:t>
             </a:fld>
             <a:endParaRPr lang="en-US" altLang="zh-TW">
               <a:solidFill>
@@ -7672,6 +7682,7 @@
               <a:rPr lang="zh-TW" altLang="en-US"/>
               <a:t>按一下以編輯母片標題樣式</a:t>
             </a:r>
+            <a:endParaRPr lang="zh-TW" altLang="en-US"/>
           </a:p>
         </p:txBody>
       </p:sp>
@@ -7737,6 +7748,7 @@
               <a:rPr lang="zh-TW" altLang="en-US"/>
               <a:t>按一下以編輯母片文字樣式</a:t>
             </a:r>
+            <a:endParaRPr lang="zh-TW" altLang="en-US"/>
           </a:p>
         </p:txBody>
       </p:sp>
@@ -7793,6 +7805,7 @@
               <a:rPr lang="zh-TW" altLang="en-US"/>
               <a:t>按一下以編輯母片文字樣式</a:t>
             </a:r>
+            <a:endParaRPr lang="zh-TW" altLang="en-US"/>
           </a:p>
           <a:p>
             <a:pPr lvl="1"/>
@@ -7800,6 +7813,7 @@
               <a:rPr lang="zh-TW" altLang="en-US"/>
               <a:t>第二層</a:t>
             </a:r>
+            <a:endParaRPr lang="zh-TW" altLang="en-US"/>
           </a:p>
           <a:p>
             <a:pPr lvl="2"/>
@@ -7807,6 +7821,7 @@
               <a:rPr lang="zh-TW" altLang="en-US"/>
               <a:t>第三層</a:t>
             </a:r>
+            <a:endParaRPr lang="zh-TW" altLang="en-US"/>
           </a:p>
           <a:p>
             <a:pPr lvl="3"/>
@@ -7814,6 +7829,7 @@
               <a:rPr lang="zh-TW" altLang="en-US"/>
               <a:t>第四層</a:t>
             </a:r>
+            <a:endParaRPr lang="zh-TW" altLang="en-US"/>
           </a:p>
           <a:p>
             <a:pPr lvl="4"/>
@@ -7821,6 +7837,7 @@
               <a:rPr lang="zh-TW" altLang="en-US"/>
               <a:t>第五層</a:t>
             </a:r>
+            <a:endParaRPr lang="zh-TW" altLang="en-US"/>
           </a:p>
         </p:txBody>
       </p:sp>
@@ -7886,6 +7903,7 @@
               <a:rPr lang="zh-TW" altLang="en-US"/>
               <a:t>按一下以編輯母片文字樣式</a:t>
             </a:r>
+            <a:endParaRPr lang="zh-TW" altLang="en-US"/>
           </a:p>
         </p:txBody>
       </p:sp>
@@ -7942,6 +7960,7 @@
               <a:rPr lang="zh-TW" altLang="en-US"/>
               <a:t>按一下以編輯母片文字樣式</a:t>
             </a:r>
+            <a:endParaRPr lang="zh-TW" altLang="en-US"/>
           </a:p>
           <a:p>
             <a:pPr lvl="1"/>
@@ -7949,6 +7968,7 @@
               <a:rPr lang="zh-TW" altLang="en-US"/>
               <a:t>第二層</a:t>
             </a:r>
+            <a:endParaRPr lang="zh-TW" altLang="en-US"/>
           </a:p>
           <a:p>
             <a:pPr lvl="2"/>
@@ -7956,6 +7976,7 @@
               <a:rPr lang="zh-TW" altLang="en-US"/>
               <a:t>第三層</a:t>
             </a:r>
+            <a:endParaRPr lang="zh-TW" altLang="en-US"/>
           </a:p>
           <a:p>
             <a:pPr lvl="3"/>
@@ -7963,6 +7984,7 @@
               <a:rPr lang="zh-TW" altLang="en-US"/>
               <a:t>第四層</a:t>
             </a:r>
+            <a:endParaRPr lang="zh-TW" altLang="en-US"/>
           </a:p>
           <a:p>
             <a:pPr lvl="4"/>
@@ -7970,6 +7992,7 @@
               <a:rPr lang="zh-TW" altLang="en-US"/>
               <a:t>第五層</a:t>
             </a:r>
+            <a:endParaRPr lang="zh-TW" altLang="en-US"/>
           </a:p>
         </p:txBody>
       </p:sp>
@@ -8001,7 +8024,6 @@
                   <a:srgbClr val="000000"/>
                 </a:solidFill>
               </a:rPr>
-              <a:t>‹#›</a:t>
             </a:fld>
             <a:endParaRPr lang="en-US" altLang="zh-TW">
               <a:solidFill>
@@ -8055,6 +8077,7 @@
               <a:rPr lang="zh-TW" altLang="en-US"/>
               <a:t>按一下以編輯母片標題樣式</a:t>
             </a:r>
+            <a:endParaRPr lang="zh-TW" altLang="en-US"/>
           </a:p>
         </p:txBody>
       </p:sp>
@@ -8086,7 +8109,6 @@
                   <a:srgbClr val="000000"/>
                 </a:solidFill>
               </a:rPr>
-              <a:t>‹#›</a:t>
             </a:fld>
             <a:endParaRPr lang="en-US" altLang="zh-TW">
               <a:solidFill>
@@ -8140,6 +8162,7 @@
               <a:rPr lang="zh-TW" altLang="en-US"/>
               <a:t>按一下以編輯母片標題樣式</a:t>
             </a:r>
+            <a:endParaRPr lang="zh-TW" altLang="en-US"/>
           </a:p>
         </p:txBody>
       </p:sp>
@@ -8196,6 +8219,7 @@
               <a:rPr lang="zh-TW" altLang="en-US"/>
               <a:t>按一下以編輯母片文字樣式</a:t>
             </a:r>
+            <a:endParaRPr lang="zh-TW" altLang="en-US"/>
           </a:p>
           <a:p>
             <a:pPr lvl="1"/>
@@ -8203,6 +8227,7 @@
               <a:rPr lang="zh-TW" altLang="en-US"/>
               <a:t>第二層</a:t>
             </a:r>
+            <a:endParaRPr lang="zh-TW" altLang="en-US"/>
           </a:p>
           <a:p>
             <a:pPr lvl="2"/>
@@ -8210,6 +8235,7 @@
               <a:rPr lang="zh-TW" altLang="en-US"/>
               <a:t>第三層</a:t>
             </a:r>
+            <a:endParaRPr lang="zh-TW" altLang="en-US"/>
           </a:p>
           <a:p>
             <a:pPr lvl="3"/>
@@ -8217,6 +8243,7 @@
               <a:rPr lang="zh-TW" altLang="en-US"/>
               <a:t>第四層</a:t>
             </a:r>
+            <a:endParaRPr lang="zh-TW" altLang="en-US"/>
           </a:p>
           <a:p>
             <a:pPr lvl="4"/>
@@ -8224,6 +8251,7 @@
               <a:rPr lang="zh-TW" altLang="en-US"/>
               <a:t>第五層</a:t>
             </a:r>
+            <a:endParaRPr lang="zh-TW" altLang="en-US"/>
           </a:p>
         </p:txBody>
       </p:sp>
@@ -8280,6 +8308,7 @@
               <a:rPr lang="zh-TW" altLang="en-US"/>
               <a:t>按一下以編輯母片文字樣式</a:t>
             </a:r>
+            <a:endParaRPr lang="zh-TW" altLang="en-US"/>
           </a:p>
           <a:p>
             <a:pPr lvl="1"/>
@@ -8287,6 +8316,7 @@
               <a:rPr lang="zh-TW" altLang="en-US"/>
               <a:t>第二層</a:t>
             </a:r>
+            <a:endParaRPr lang="zh-TW" altLang="en-US"/>
           </a:p>
           <a:p>
             <a:pPr lvl="2"/>
@@ -8294,6 +8324,7 @@
               <a:rPr lang="zh-TW" altLang="en-US"/>
               <a:t>第三層</a:t>
             </a:r>
+            <a:endParaRPr lang="zh-TW" altLang="en-US"/>
           </a:p>
           <a:p>
             <a:pPr lvl="3"/>
@@ -8301,6 +8332,7 @@
               <a:rPr lang="zh-TW" altLang="en-US"/>
               <a:t>第四層</a:t>
             </a:r>
+            <a:endParaRPr lang="zh-TW" altLang="en-US"/>
           </a:p>
           <a:p>
             <a:pPr lvl="4"/>
@@ -8308,6 +8340,7 @@
               <a:rPr lang="zh-TW" altLang="en-US"/>
               <a:t>第五層</a:t>
             </a:r>
+            <a:endParaRPr lang="zh-TW" altLang="en-US"/>
           </a:p>
         </p:txBody>
       </p:sp>
@@ -8335,7 +8368,6 @@
             </a:pPr>
             <a:fld id="{549D7BD4-4153-4232-9FDF-0A95D9B5C8DE}" type="slidenum">
               <a:rPr lang="zh-TW" altLang="en-US"/>
-              <a:t>‹#›</a:t>
             </a:fld>
             <a:endParaRPr lang="en-US" altLang="zh-TW"/>
           </a:p>
@@ -8394,7 +8426,6 @@
                   <a:srgbClr val="000000"/>
                 </a:solidFill>
               </a:rPr>
-              <a:t>‹#›</a:t>
             </a:fld>
             <a:endParaRPr lang="en-US" altLang="zh-TW">
               <a:solidFill>
@@ -8457,6 +8488,7 @@
               <a:rPr lang="zh-TW" altLang="en-US"/>
               <a:t>按一下以編輯母片標題樣式</a:t>
             </a:r>
+            <a:endParaRPr lang="zh-TW" altLang="en-US"/>
           </a:p>
         </p:txBody>
       </p:sp>
@@ -8522,6 +8554,7 @@
               <a:rPr lang="zh-TW" altLang="en-US"/>
               <a:t>按一下以編輯母片文字樣式</a:t>
             </a:r>
+            <a:endParaRPr lang="zh-TW" altLang="en-US"/>
           </a:p>
         </p:txBody>
       </p:sp>
@@ -8553,7 +8586,6 @@
                   <a:srgbClr val="000000"/>
                 </a:solidFill>
               </a:rPr>
-              <a:t>‹#›</a:t>
             </a:fld>
             <a:endParaRPr lang="en-US" altLang="zh-TW">
               <a:solidFill>
@@ -8616,6 +8648,7 @@
               <a:rPr lang="zh-TW" altLang="en-US"/>
               <a:t>按一下以編輯母片標題樣式</a:t>
             </a:r>
+            <a:endParaRPr lang="zh-TW" altLang="en-US"/>
           </a:p>
         </p:txBody>
       </p:sp>
@@ -8743,6 +8776,7 @@
               <a:rPr lang="zh-TW" altLang="en-US"/>
               <a:t>按一下以編輯母片文字樣式</a:t>
             </a:r>
+            <a:endParaRPr lang="zh-TW" altLang="en-US"/>
           </a:p>
         </p:txBody>
       </p:sp>
@@ -8774,7 +8808,6 @@
                   <a:srgbClr val="000000"/>
                 </a:solidFill>
               </a:rPr>
-              <a:t>‹#›</a:t>
             </a:fld>
             <a:endParaRPr lang="en-US" altLang="zh-TW">
               <a:solidFill>
@@ -8828,6 +8861,7 @@
               <a:rPr lang="zh-TW" altLang="en-US"/>
               <a:t>按一下以編輯母片標題樣式</a:t>
             </a:r>
+            <a:endParaRPr lang="zh-TW" altLang="en-US"/>
           </a:p>
         </p:txBody>
       </p:sp>
@@ -8851,6 +8885,7 @@
               <a:rPr lang="zh-TW" altLang="en-US"/>
               <a:t>按一下以編輯母片文字樣式</a:t>
             </a:r>
+            <a:endParaRPr lang="zh-TW" altLang="en-US"/>
           </a:p>
           <a:p>
             <a:pPr lvl="1"/>
@@ -8858,6 +8893,7 @@
               <a:rPr lang="zh-TW" altLang="en-US"/>
               <a:t>第二層</a:t>
             </a:r>
+            <a:endParaRPr lang="zh-TW" altLang="en-US"/>
           </a:p>
           <a:p>
             <a:pPr lvl="2"/>
@@ -8865,6 +8901,7 @@
               <a:rPr lang="zh-TW" altLang="en-US"/>
               <a:t>第三層</a:t>
             </a:r>
+            <a:endParaRPr lang="zh-TW" altLang="en-US"/>
           </a:p>
           <a:p>
             <a:pPr lvl="3"/>
@@ -8872,6 +8909,7 @@
               <a:rPr lang="zh-TW" altLang="en-US"/>
               <a:t>第四層</a:t>
             </a:r>
+            <a:endParaRPr lang="zh-TW" altLang="en-US"/>
           </a:p>
           <a:p>
             <a:pPr lvl="4"/>
@@ -8879,6 +8917,7 @@
               <a:rPr lang="zh-TW" altLang="en-US"/>
               <a:t>第五層</a:t>
             </a:r>
+            <a:endParaRPr lang="zh-TW" altLang="en-US"/>
           </a:p>
         </p:txBody>
       </p:sp>
@@ -8910,7 +8949,6 @@
                   <a:srgbClr val="000000"/>
                 </a:solidFill>
               </a:rPr>
-              <a:t>‹#›</a:t>
             </a:fld>
             <a:endParaRPr lang="en-US" altLang="zh-TW">
               <a:solidFill>
@@ -8969,6 +9007,7 @@
               <a:rPr lang="zh-TW" altLang="en-US"/>
               <a:t>按一下以編輯母片標題樣式</a:t>
             </a:r>
+            <a:endParaRPr lang="zh-TW" altLang="en-US"/>
           </a:p>
         </p:txBody>
       </p:sp>
@@ -8997,6 +9036,7 @@
               <a:rPr lang="zh-TW" altLang="en-US"/>
               <a:t>按一下以編輯母片文字樣式</a:t>
             </a:r>
+            <a:endParaRPr lang="zh-TW" altLang="en-US"/>
           </a:p>
           <a:p>
             <a:pPr lvl="1"/>
@@ -9004,6 +9044,7 @@
               <a:rPr lang="zh-TW" altLang="en-US"/>
               <a:t>第二層</a:t>
             </a:r>
+            <a:endParaRPr lang="zh-TW" altLang="en-US"/>
           </a:p>
           <a:p>
             <a:pPr lvl="2"/>
@@ -9011,6 +9052,7 @@
               <a:rPr lang="zh-TW" altLang="en-US"/>
               <a:t>第三層</a:t>
             </a:r>
+            <a:endParaRPr lang="zh-TW" altLang="en-US"/>
           </a:p>
           <a:p>
             <a:pPr lvl="3"/>
@@ -9018,6 +9060,7 @@
               <a:rPr lang="zh-TW" altLang="en-US"/>
               <a:t>第四層</a:t>
             </a:r>
+            <a:endParaRPr lang="zh-TW" altLang="en-US"/>
           </a:p>
           <a:p>
             <a:pPr lvl="4"/>
@@ -9025,6 +9068,7 @@
               <a:rPr lang="zh-TW" altLang="en-US"/>
               <a:t>第五層</a:t>
             </a:r>
+            <a:endParaRPr lang="zh-TW" altLang="en-US"/>
           </a:p>
         </p:txBody>
       </p:sp>
@@ -9056,7 +9100,6 @@
                   <a:srgbClr val="000000"/>
                 </a:solidFill>
               </a:rPr>
-              <a:t>‹#›</a:t>
             </a:fld>
             <a:endParaRPr lang="en-US" altLang="zh-TW">
               <a:solidFill>
@@ -9115,6 +9158,7 @@
               <a:rPr lang="zh-TW" altLang="en-US"/>
               <a:t>按一下以編輯母片標題樣式</a:t>
             </a:r>
+            <a:endParaRPr lang="zh-TW" altLang="en-US"/>
           </a:p>
         </p:txBody>
       </p:sp>
@@ -9233,6 +9277,7 @@
               <a:rPr lang="zh-TW" altLang="en-US"/>
               <a:t>按一下以編輯母片副標題樣式</a:t>
             </a:r>
+            <a:endParaRPr lang="zh-TW" altLang="en-US"/>
           </a:p>
         </p:txBody>
       </p:sp>
@@ -9253,7 +9298,6 @@
           <a:p>
             <a:fld id="{79EFF09E-4EA0-4518-A9E8-449DE34F8B74}" type="datetimeFigureOut">
               <a:rPr lang="zh-TW" altLang="en-US" smtClean="0"/>
-              <a:t>2026/4/30</a:t>
             </a:fld>
             <a:endParaRPr lang="zh-TW" altLang="en-US"/>
           </a:p>
@@ -9295,7 +9339,6 @@
           <a:p>
             <a:fld id="{9C4C9021-A16D-4E5C-A421-A5275F523D45}" type="slidenum">
               <a:rPr lang="zh-TW" altLang="en-US" smtClean="0"/>
-              <a:t>‹#›</a:t>
             </a:fld>
             <a:endParaRPr lang="zh-TW" altLang="en-US"/>
           </a:p>
@@ -9345,6 +9388,7 @@
               <a:rPr lang="zh-TW" altLang="en-US"/>
               <a:t>按一下以編輯母片標題樣式</a:t>
             </a:r>
+            <a:endParaRPr lang="zh-TW" altLang="en-US"/>
           </a:p>
         </p:txBody>
       </p:sp>
@@ -9368,6 +9412,7 @@
               <a:rPr lang="zh-TW" altLang="en-US"/>
               <a:t>按一下以編輯母片文字樣式</a:t>
             </a:r>
+            <a:endParaRPr lang="zh-TW" altLang="en-US"/>
           </a:p>
           <a:p>
             <a:pPr lvl="1"/>
@@ -9375,6 +9420,7 @@
               <a:rPr lang="zh-TW" altLang="en-US"/>
               <a:t>第二層</a:t>
             </a:r>
+            <a:endParaRPr lang="zh-TW" altLang="en-US"/>
           </a:p>
           <a:p>
             <a:pPr lvl="2"/>
@@ -9382,6 +9428,7 @@
               <a:rPr lang="zh-TW" altLang="en-US"/>
               <a:t>第三層</a:t>
             </a:r>
+            <a:endParaRPr lang="zh-TW" altLang="en-US"/>
           </a:p>
           <a:p>
             <a:pPr lvl="3"/>
@@ -9389,6 +9436,7 @@
               <a:rPr lang="zh-TW" altLang="en-US"/>
               <a:t>第四層</a:t>
             </a:r>
+            <a:endParaRPr lang="zh-TW" altLang="en-US"/>
           </a:p>
           <a:p>
             <a:pPr lvl="4"/>
@@ -9396,6 +9444,7 @@
               <a:rPr lang="zh-TW" altLang="en-US"/>
               <a:t>第五層</a:t>
             </a:r>
+            <a:endParaRPr lang="zh-TW" altLang="en-US"/>
           </a:p>
         </p:txBody>
       </p:sp>
@@ -9416,7 +9465,6 @@
           <a:p>
             <a:fld id="{79EFF09E-4EA0-4518-A9E8-449DE34F8B74}" type="datetimeFigureOut">
               <a:rPr lang="zh-TW" altLang="en-US" smtClean="0"/>
-              <a:t>2026/4/30</a:t>
             </a:fld>
             <a:endParaRPr lang="zh-TW" altLang="en-US"/>
           </a:p>
@@ -9458,7 +9506,6 @@
           <a:p>
             <a:fld id="{9C4C9021-A16D-4E5C-A421-A5275F523D45}" type="slidenum">
               <a:rPr lang="zh-TW" altLang="en-US" smtClean="0"/>
-              <a:t>‹#›</a:t>
             </a:fld>
             <a:endParaRPr lang="zh-TW" altLang="en-US"/>
           </a:p>
@@ -9517,6 +9564,7 @@
               <a:rPr lang="zh-TW" altLang="en-US"/>
               <a:t>按一下以編輯母片標題樣式</a:t>
             </a:r>
+            <a:endParaRPr lang="zh-TW" altLang="en-US"/>
           </a:p>
         </p:txBody>
       </p:sp>
@@ -9636,6 +9684,7 @@
               <a:rPr lang="zh-TW" altLang="en-US"/>
               <a:t>按一下以編輯母片文字樣式</a:t>
             </a:r>
+            <a:endParaRPr lang="zh-TW" altLang="en-US"/>
           </a:p>
         </p:txBody>
       </p:sp>
@@ -9656,7 +9705,6 @@
           <a:p>
             <a:fld id="{79EFF09E-4EA0-4518-A9E8-449DE34F8B74}" type="datetimeFigureOut">
               <a:rPr lang="zh-TW" altLang="en-US" smtClean="0"/>
-              <a:t>2026/4/30</a:t>
             </a:fld>
             <a:endParaRPr lang="zh-TW" altLang="en-US"/>
           </a:p>
@@ -9698,7 +9746,6 @@
           <a:p>
             <a:fld id="{9C4C9021-A16D-4E5C-A421-A5275F523D45}" type="slidenum">
               <a:rPr lang="zh-TW" altLang="en-US" smtClean="0"/>
-              <a:t>‹#›</a:t>
             </a:fld>
             <a:endParaRPr lang="zh-TW" altLang="en-US"/>
           </a:p>
@@ -9748,6 +9795,7 @@
               <a:rPr lang="zh-TW" altLang="en-US"/>
               <a:t>按一下以編輯母片標題樣式</a:t>
             </a:r>
+            <a:endParaRPr lang="zh-TW" altLang="en-US"/>
           </a:p>
         </p:txBody>
       </p:sp>
@@ -9804,6 +9852,7 @@
               <a:rPr lang="zh-TW" altLang="en-US"/>
               <a:t>按一下以編輯母片文字樣式</a:t>
             </a:r>
+            <a:endParaRPr lang="zh-TW" altLang="en-US"/>
           </a:p>
           <a:p>
             <a:pPr lvl="1"/>
@@ -9811,6 +9860,7 @@
               <a:rPr lang="zh-TW" altLang="en-US"/>
               <a:t>第二層</a:t>
             </a:r>
+            <a:endParaRPr lang="zh-TW" altLang="en-US"/>
           </a:p>
           <a:p>
             <a:pPr lvl="2"/>
@@ -9818,6 +9868,7 @@
               <a:rPr lang="zh-TW" altLang="en-US"/>
               <a:t>第三層</a:t>
             </a:r>
+            <a:endParaRPr lang="zh-TW" altLang="en-US"/>
           </a:p>
           <a:p>
             <a:pPr lvl="3"/>
@@ -9825,6 +9876,7 @@
               <a:rPr lang="zh-TW" altLang="en-US"/>
               <a:t>第四層</a:t>
             </a:r>
+            <a:endParaRPr lang="zh-TW" altLang="en-US"/>
           </a:p>
           <a:p>
             <a:pPr lvl="4"/>
@@ -9832,6 +9884,7 @@
               <a:rPr lang="zh-TW" altLang="en-US"/>
               <a:t>第五層</a:t>
             </a:r>
+            <a:endParaRPr lang="zh-TW" altLang="en-US"/>
           </a:p>
         </p:txBody>
       </p:sp>
@@ -9888,6 +9941,7 @@
               <a:rPr lang="zh-TW" altLang="en-US"/>
               <a:t>按一下以編輯母片文字樣式</a:t>
             </a:r>
+            <a:endParaRPr lang="zh-TW" altLang="en-US"/>
           </a:p>
           <a:p>
             <a:pPr lvl="1"/>
@@ -9895,6 +9949,7 @@
               <a:rPr lang="zh-TW" altLang="en-US"/>
               <a:t>第二層</a:t>
             </a:r>
+            <a:endParaRPr lang="zh-TW" altLang="en-US"/>
           </a:p>
           <a:p>
             <a:pPr lvl="2"/>
@@ -9902,6 +9957,7 @@
               <a:rPr lang="zh-TW" altLang="en-US"/>
               <a:t>第三層</a:t>
             </a:r>
+            <a:endParaRPr lang="zh-TW" altLang="en-US"/>
           </a:p>
           <a:p>
             <a:pPr lvl="3"/>
@@ -9909,6 +9965,7 @@
               <a:rPr lang="zh-TW" altLang="en-US"/>
               <a:t>第四層</a:t>
             </a:r>
+            <a:endParaRPr lang="zh-TW" altLang="en-US"/>
           </a:p>
           <a:p>
             <a:pPr lvl="4"/>
@@ -9916,6 +9973,7 @@
               <a:rPr lang="zh-TW" altLang="en-US"/>
               <a:t>第五層</a:t>
             </a:r>
+            <a:endParaRPr lang="zh-TW" altLang="en-US"/>
           </a:p>
         </p:txBody>
       </p:sp>
@@ -9936,7 +9994,6 @@
           <a:p>
             <a:fld id="{79EFF09E-4EA0-4518-A9E8-449DE34F8B74}" type="datetimeFigureOut">
               <a:rPr lang="zh-TW" altLang="en-US" smtClean="0"/>
-              <a:t>2026/4/30</a:t>
             </a:fld>
             <a:endParaRPr lang="zh-TW" altLang="en-US"/>
           </a:p>
@@ -9978,7 +10035,6 @@
           <a:p>
             <a:fld id="{9C4C9021-A16D-4E5C-A421-A5275F523D45}" type="slidenum">
               <a:rPr lang="zh-TW" altLang="en-US" smtClean="0"/>
-              <a:t>‹#›</a:t>
             </a:fld>
             <a:endParaRPr lang="zh-TW" altLang="en-US"/>
           </a:p>
@@ -10032,6 +10088,7 @@
               <a:rPr lang="zh-TW" altLang="en-US"/>
               <a:t>按一下以編輯母片標題樣式</a:t>
             </a:r>
+            <a:endParaRPr lang="zh-TW" altLang="en-US"/>
           </a:p>
         </p:txBody>
       </p:sp>
@@ -10097,6 +10154,7 @@
               <a:rPr lang="zh-TW" altLang="en-US"/>
               <a:t>按一下以編輯母片文字樣式</a:t>
             </a:r>
+            <a:endParaRPr lang="zh-TW" altLang="en-US"/>
           </a:p>
         </p:txBody>
       </p:sp>
@@ -10153,6 +10211,7 @@
               <a:rPr lang="zh-TW" altLang="en-US"/>
               <a:t>按一下以編輯母片文字樣式</a:t>
             </a:r>
+            <a:endParaRPr lang="zh-TW" altLang="en-US"/>
           </a:p>
           <a:p>
             <a:pPr lvl="1"/>
@@ -10160,6 +10219,7 @@
               <a:rPr lang="zh-TW" altLang="en-US"/>
               <a:t>第二層</a:t>
             </a:r>
+            <a:endParaRPr lang="zh-TW" altLang="en-US"/>
           </a:p>
           <a:p>
             <a:pPr lvl="2"/>
@@ -10167,6 +10227,7 @@
               <a:rPr lang="zh-TW" altLang="en-US"/>
               <a:t>第三層</a:t>
             </a:r>
+            <a:endParaRPr lang="zh-TW" altLang="en-US"/>
           </a:p>
           <a:p>
             <a:pPr lvl="3"/>
@@ -10174,6 +10235,7 @@
               <a:rPr lang="zh-TW" altLang="en-US"/>
               <a:t>第四層</a:t>
             </a:r>
+            <a:endParaRPr lang="zh-TW" altLang="en-US"/>
           </a:p>
           <a:p>
             <a:pPr lvl="4"/>
@@ -10181,6 +10243,7 @@
               <a:rPr lang="zh-TW" altLang="en-US"/>
               <a:t>第五層</a:t>
             </a:r>
+            <a:endParaRPr lang="zh-TW" altLang="en-US"/>
           </a:p>
         </p:txBody>
       </p:sp>
@@ -10246,6 +10309,7 @@
               <a:rPr lang="zh-TW" altLang="en-US"/>
               <a:t>按一下以編輯母片文字樣式</a:t>
             </a:r>
+            <a:endParaRPr lang="zh-TW" altLang="en-US"/>
           </a:p>
         </p:txBody>
       </p:sp>
@@ -10302,6 +10366,7 @@
               <a:rPr lang="zh-TW" altLang="en-US"/>
               <a:t>按一下以編輯母片文字樣式</a:t>
             </a:r>
+            <a:endParaRPr lang="zh-TW" altLang="en-US"/>
           </a:p>
           <a:p>
             <a:pPr lvl="1"/>
@@ -10309,6 +10374,7 @@
               <a:rPr lang="zh-TW" altLang="en-US"/>
               <a:t>第二層</a:t>
             </a:r>
+            <a:endParaRPr lang="zh-TW" altLang="en-US"/>
           </a:p>
           <a:p>
             <a:pPr lvl="2"/>
@@ -10316,6 +10382,7 @@
               <a:rPr lang="zh-TW" altLang="en-US"/>
               <a:t>第三層</a:t>
             </a:r>
+            <a:endParaRPr lang="zh-TW" altLang="en-US"/>
           </a:p>
           <a:p>
             <a:pPr lvl="3"/>
@@ -10323,6 +10390,7 @@
               <a:rPr lang="zh-TW" altLang="en-US"/>
               <a:t>第四層</a:t>
             </a:r>
+            <a:endParaRPr lang="zh-TW" altLang="en-US"/>
           </a:p>
           <a:p>
             <a:pPr lvl="4"/>
@@ -10330,6 +10398,7 @@
               <a:rPr lang="zh-TW" altLang="en-US"/>
               <a:t>第五層</a:t>
             </a:r>
+            <a:endParaRPr lang="zh-TW" altLang="en-US"/>
           </a:p>
         </p:txBody>
       </p:sp>
@@ -10350,7 +10419,6 @@
           <a:p>
             <a:fld id="{79EFF09E-4EA0-4518-A9E8-449DE34F8B74}" type="datetimeFigureOut">
               <a:rPr lang="zh-TW" altLang="en-US" smtClean="0"/>
-              <a:t>2026/4/30</a:t>
             </a:fld>
             <a:endParaRPr lang="zh-TW" altLang="en-US"/>
           </a:p>
@@ -10392,7 +10460,6 @@
           <a:p>
             <a:fld id="{9C4C9021-A16D-4E5C-A421-A5275F523D45}" type="slidenum">
               <a:rPr lang="zh-TW" altLang="en-US" smtClean="0"/>
-              <a:t>‹#›</a:t>
             </a:fld>
             <a:endParaRPr lang="zh-TW" altLang="en-US"/>
           </a:p>
@@ -10451,6 +10518,7 @@
               <a:rPr lang="zh-TW" altLang="en-US"/>
               <a:t>按一下以編輯母片標題樣式</a:t>
             </a:r>
+            <a:endParaRPr lang="zh-TW" altLang="en-US"/>
           </a:p>
         </p:txBody>
       </p:sp>
@@ -10516,6 +10584,7 @@
               <a:rPr lang="zh-TW" altLang="en-US"/>
               <a:t>按一下以編輯母片文字樣式</a:t>
             </a:r>
+            <a:endParaRPr lang="zh-TW" altLang="en-US"/>
           </a:p>
         </p:txBody>
       </p:sp>
@@ -10572,6 +10641,7 @@
               <a:rPr lang="zh-TW" altLang="en-US"/>
               <a:t>按一下以編輯母片文字樣式</a:t>
             </a:r>
+            <a:endParaRPr lang="zh-TW" altLang="en-US"/>
           </a:p>
           <a:p>
             <a:pPr lvl="1"/>
@@ -10579,6 +10649,7 @@
               <a:rPr lang="zh-TW" altLang="en-US"/>
               <a:t>第二層</a:t>
             </a:r>
+            <a:endParaRPr lang="zh-TW" altLang="en-US"/>
           </a:p>
           <a:p>
             <a:pPr lvl="2"/>
@@ -10586,6 +10657,7 @@
               <a:rPr lang="zh-TW" altLang="en-US"/>
               <a:t>第三層</a:t>
             </a:r>
+            <a:endParaRPr lang="zh-TW" altLang="en-US"/>
           </a:p>
           <a:p>
             <a:pPr lvl="3"/>
@@ -10593,6 +10665,7 @@
               <a:rPr lang="zh-TW" altLang="en-US"/>
               <a:t>第四層</a:t>
             </a:r>
+            <a:endParaRPr lang="zh-TW" altLang="en-US"/>
           </a:p>
           <a:p>
             <a:pPr lvl="4"/>
@@ -10600,6 +10673,7 @@
               <a:rPr lang="zh-TW" altLang="en-US"/>
               <a:t>第五層</a:t>
             </a:r>
+            <a:endParaRPr lang="zh-TW" altLang="en-US"/>
           </a:p>
         </p:txBody>
       </p:sp>
@@ -10665,6 +10739,7 @@
               <a:rPr lang="zh-TW" altLang="en-US"/>
               <a:t>按一下以編輯母片文字樣式</a:t>
             </a:r>
+            <a:endParaRPr lang="zh-TW" altLang="en-US"/>
           </a:p>
         </p:txBody>
       </p:sp>
@@ -10721,6 +10796,7 @@
               <a:rPr lang="zh-TW" altLang="en-US"/>
               <a:t>按一下以編輯母片文字樣式</a:t>
             </a:r>
+            <a:endParaRPr lang="zh-TW" altLang="en-US"/>
           </a:p>
           <a:p>
             <a:pPr lvl="1"/>
@@ -10728,6 +10804,7 @@
               <a:rPr lang="zh-TW" altLang="en-US"/>
               <a:t>第二層</a:t>
             </a:r>
+            <a:endParaRPr lang="zh-TW" altLang="en-US"/>
           </a:p>
           <a:p>
             <a:pPr lvl="2"/>
@@ -10735,6 +10812,7 @@
               <a:rPr lang="zh-TW" altLang="en-US"/>
               <a:t>第三層</a:t>
             </a:r>
+            <a:endParaRPr lang="zh-TW" altLang="en-US"/>
           </a:p>
           <a:p>
             <a:pPr lvl="3"/>
@@ -10742,6 +10820,7 @@
               <a:rPr lang="zh-TW" altLang="en-US"/>
               <a:t>第四層</a:t>
             </a:r>
+            <a:endParaRPr lang="zh-TW" altLang="en-US"/>
           </a:p>
           <a:p>
             <a:pPr lvl="4"/>
@@ -10749,6 +10828,7 @@
               <a:rPr lang="zh-TW" altLang="en-US"/>
               <a:t>第五層</a:t>
             </a:r>
+            <a:endParaRPr lang="zh-TW" altLang="en-US"/>
           </a:p>
         </p:txBody>
       </p:sp>
@@ -10776,7 +10856,6 @@
             </a:pPr>
             <a:fld id="{56BE1F83-3BEF-49AC-ABC8-8C6E80176E9C}" type="slidenum">
               <a:rPr lang="zh-TW" altLang="en-US"/>
-              <a:t>‹#›</a:t>
             </a:fld>
             <a:endParaRPr lang="en-US" altLang="zh-TW"/>
           </a:p>
@@ -10826,6 +10905,7 @@
               <a:rPr lang="zh-TW" altLang="en-US"/>
               <a:t>按一下以編輯母片標題樣式</a:t>
             </a:r>
+            <a:endParaRPr lang="zh-TW" altLang="en-US"/>
           </a:p>
         </p:txBody>
       </p:sp>
@@ -10846,7 +10926,6 @@
           <a:p>
             <a:fld id="{79EFF09E-4EA0-4518-A9E8-449DE34F8B74}" type="datetimeFigureOut">
               <a:rPr lang="zh-TW" altLang="en-US" smtClean="0"/>
-              <a:t>2026/4/30</a:t>
             </a:fld>
             <a:endParaRPr lang="zh-TW" altLang="en-US"/>
           </a:p>
@@ -10888,7 +10967,6 @@
           <a:p>
             <a:fld id="{9C4C9021-A16D-4E5C-A421-A5275F523D45}" type="slidenum">
               <a:rPr lang="zh-TW" altLang="en-US" smtClean="0"/>
-              <a:t>‹#›</a:t>
             </a:fld>
             <a:endParaRPr lang="zh-TW" altLang="en-US"/>
           </a:p>
@@ -10936,7 +11014,6 @@
           <a:p>
             <a:fld id="{79EFF09E-4EA0-4518-A9E8-449DE34F8B74}" type="datetimeFigureOut">
               <a:rPr lang="zh-TW" altLang="en-US" smtClean="0"/>
-              <a:t>2026/4/30</a:t>
             </a:fld>
             <a:endParaRPr lang="zh-TW" altLang="en-US"/>
           </a:p>
@@ -10978,7 +11055,6 @@
           <a:p>
             <a:fld id="{9C4C9021-A16D-4E5C-A421-A5275F523D45}" type="slidenum">
               <a:rPr lang="zh-TW" altLang="en-US" smtClean="0"/>
-              <a:t>‹#›</a:t>
             </a:fld>
             <a:endParaRPr lang="zh-TW" altLang="en-US"/>
           </a:p>
@@ -11037,6 +11113,7 @@
               <a:rPr lang="zh-TW" altLang="en-US"/>
               <a:t>按一下以編輯母片標題樣式</a:t>
             </a:r>
+            <a:endParaRPr lang="zh-TW" altLang="en-US"/>
           </a:p>
         </p:txBody>
       </p:sp>
@@ -11093,6 +11170,7 @@
               <a:rPr lang="zh-TW" altLang="en-US"/>
               <a:t>按一下以編輯母片文字樣式</a:t>
             </a:r>
+            <a:endParaRPr lang="zh-TW" altLang="en-US"/>
           </a:p>
           <a:p>
             <a:pPr lvl="1"/>
@@ -11100,6 +11178,7 @@
               <a:rPr lang="zh-TW" altLang="en-US"/>
               <a:t>第二層</a:t>
             </a:r>
+            <a:endParaRPr lang="zh-TW" altLang="en-US"/>
           </a:p>
           <a:p>
             <a:pPr lvl="2"/>
@@ -11107,6 +11186,7 @@
               <a:rPr lang="zh-TW" altLang="en-US"/>
               <a:t>第三層</a:t>
             </a:r>
+            <a:endParaRPr lang="zh-TW" altLang="en-US"/>
           </a:p>
           <a:p>
             <a:pPr lvl="3"/>
@@ -11114,6 +11194,7 @@
               <a:rPr lang="zh-TW" altLang="en-US"/>
               <a:t>第四層</a:t>
             </a:r>
+            <a:endParaRPr lang="zh-TW" altLang="en-US"/>
           </a:p>
           <a:p>
             <a:pPr lvl="4"/>
@@ -11121,6 +11202,7 @@
               <a:rPr lang="zh-TW" altLang="en-US"/>
               <a:t>第五層</a:t>
             </a:r>
+            <a:endParaRPr lang="zh-TW" altLang="en-US"/>
           </a:p>
         </p:txBody>
       </p:sp>
@@ -11186,6 +11268,7 @@
               <a:rPr lang="zh-TW" altLang="en-US"/>
               <a:t>按一下以編輯母片文字樣式</a:t>
             </a:r>
+            <a:endParaRPr lang="zh-TW" altLang="en-US"/>
           </a:p>
         </p:txBody>
       </p:sp>
@@ -11206,7 +11289,6 @@
           <a:p>
             <a:fld id="{79EFF09E-4EA0-4518-A9E8-449DE34F8B74}" type="datetimeFigureOut">
               <a:rPr lang="zh-TW" altLang="en-US" smtClean="0"/>
-              <a:t>2026/4/30</a:t>
             </a:fld>
             <a:endParaRPr lang="zh-TW" altLang="en-US"/>
           </a:p>
@@ -11248,7 +11330,6 @@
           <a:p>
             <a:fld id="{9C4C9021-A16D-4E5C-A421-A5275F523D45}" type="slidenum">
               <a:rPr lang="zh-TW" altLang="en-US" smtClean="0"/>
-              <a:t>‹#›</a:t>
             </a:fld>
             <a:endParaRPr lang="zh-TW" altLang="en-US"/>
           </a:p>
@@ -11307,6 +11388,7 @@
               <a:rPr lang="zh-TW" altLang="en-US"/>
               <a:t>按一下以編輯母片標題樣式</a:t>
             </a:r>
+            <a:endParaRPr lang="zh-TW" altLang="en-US"/>
           </a:p>
         </p:txBody>
       </p:sp>
@@ -11433,6 +11515,7 @@
               <a:rPr lang="zh-TW" altLang="en-US"/>
               <a:t>按一下以編輯母片文字樣式</a:t>
             </a:r>
+            <a:endParaRPr lang="zh-TW" altLang="en-US"/>
           </a:p>
         </p:txBody>
       </p:sp>
@@ -11453,7 +11536,6 @@
           <a:p>
             <a:fld id="{79EFF09E-4EA0-4518-A9E8-449DE34F8B74}" type="datetimeFigureOut">
               <a:rPr lang="zh-TW" altLang="en-US" smtClean="0"/>
-              <a:t>2026/4/30</a:t>
             </a:fld>
             <a:endParaRPr lang="zh-TW" altLang="en-US"/>
           </a:p>
@@ -11495,7 +11577,6 @@
           <a:p>
             <a:fld id="{9C4C9021-A16D-4E5C-A421-A5275F523D45}" type="slidenum">
               <a:rPr lang="zh-TW" altLang="en-US" smtClean="0"/>
-              <a:t>‹#›</a:t>
             </a:fld>
             <a:endParaRPr lang="zh-TW" altLang="en-US"/>
           </a:p>
@@ -11545,6 +11626,7 @@
               <a:rPr lang="zh-TW" altLang="en-US"/>
               <a:t>按一下以編輯母片標題樣式</a:t>
             </a:r>
+            <a:endParaRPr lang="zh-TW" altLang="en-US"/>
           </a:p>
         </p:txBody>
       </p:sp>
@@ -11568,6 +11650,7 @@
               <a:rPr lang="zh-TW" altLang="en-US"/>
               <a:t>按一下以編輯母片文字樣式</a:t>
             </a:r>
+            <a:endParaRPr lang="zh-TW" altLang="en-US"/>
           </a:p>
           <a:p>
             <a:pPr lvl="1"/>
@@ -11575,6 +11658,7 @@
               <a:rPr lang="zh-TW" altLang="en-US"/>
               <a:t>第二層</a:t>
             </a:r>
+            <a:endParaRPr lang="zh-TW" altLang="en-US"/>
           </a:p>
           <a:p>
             <a:pPr lvl="2"/>
@@ -11582,6 +11666,7 @@
               <a:rPr lang="zh-TW" altLang="en-US"/>
               <a:t>第三層</a:t>
             </a:r>
+            <a:endParaRPr lang="zh-TW" altLang="en-US"/>
           </a:p>
           <a:p>
             <a:pPr lvl="3"/>
@@ -11589,6 +11674,7 @@
               <a:rPr lang="zh-TW" altLang="en-US"/>
               <a:t>第四層</a:t>
             </a:r>
+            <a:endParaRPr lang="zh-TW" altLang="en-US"/>
           </a:p>
           <a:p>
             <a:pPr lvl="4"/>
@@ -11596,6 +11682,7 @@
               <a:rPr lang="zh-TW" altLang="en-US"/>
               <a:t>第五層</a:t>
             </a:r>
+            <a:endParaRPr lang="zh-TW" altLang="en-US"/>
           </a:p>
         </p:txBody>
       </p:sp>
@@ -11616,7 +11703,6 @@
           <a:p>
             <a:fld id="{79EFF09E-4EA0-4518-A9E8-449DE34F8B74}" type="datetimeFigureOut">
               <a:rPr lang="zh-TW" altLang="en-US" smtClean="0"/>
-              <a:t>2026/4/30</a:t>
             </a:fld>
             <a:endParaRPr lang="zh-TW" altLang="en-US"/>
           </a:p>
@@ -11658,7 +11744,6 @@
           <a:p>
             <a:fld id="{9C4C9021-A16D-4E5C-A421-A5275F523D45}" type="slidenum">
               <a:rPr lang="zh-TW" altLang="en-US" smtClean="0"/>
-              <a:t>‹#›</a:t>
             </a:fld>
             <a:endParaRPr lang="zh-TW" altLang="en-US"/>
           </a:p>
@@ -11713,6 +11798,7 @@
               <a:rPr lang="zh-TW" altLang="en-US"/>
               <a:t>按一下以編輯母片標題樣式</a:t>
             </a:r>
+            <a:endParaRPr lang="zh-TW" altLang="en-US"/>
           </a:p>
         </p:txBody>
       </p:sp>
@@ -11741,6 +11827,7 @@
               <a:rPr lang="zh-TW" altLang="en-US"/>
               <a:t>按一下以編輯母片文字樣式</a:t>
             </a:r>
+            <a:endParaRPr lang="zh-TW" altLang="en-US"/>
           </a:p>
           <a:p>
             <a:pPr lvl="1"/>
@@ -11748,6 +11835,7 @@
               <a:rPr lang="zh-TW" altLang="en-US"/>
               <a:t>第二層</a:t>
             </a:r>
+            <a:endParaRPr lang="zh-TW" altLang="en-US"/>
           </a:p>
           <a:p>
             <a:pPr lvl="2"/>
@@ -11755,6 +11843,7 @@
               <a:rPr lang="zh-TW" altLang="en-US"/>
               <a:t>第三層</a:t>
             </a:r>
+            <a:endParaRPr lang="zh-TW" altLang="en-US"/>
           </a:p>
           <a:p>
             <a:pPr lvl="3"/>
@@ -11762,6 +11851,7 @@
               <a:rPr lang="zh-TW" altLang="en-US"/>
               <a:t>第四層</a:t>
             </a:r>
+            <a:endParaRPr lang="zh-TW" altLang="en-US"/>
           </a:p>
           <a:p>
             <a:pPr lvl="4"/>
@@ -11769,6 +11859,7 @@
               <a:rPr lang="zh-TW" altLang="en-US"/>
               <a:t>第五層</a:t>
             </a:r>
+            <a:endParaRPr lang="zh-TW" altLang="en-US"/>
           </a:p>
         </p:txBody>
       </p:sp>
@@ -11789,7 +11880,6 @@
           <a:p>
             <a:fld id="{79EFF09E-4EA0-4518-A9E8-449DE34F8B74}" type="datetimeFigureOut">
               <a:rPr lang="zh-TW" altLang="en-US" smtClean="0"/>
-              <a:t>2026/4/30</a:t>
             </a:fld>
             <a:endParaRPr lang="zh-TW" altLang="en-US"/>
           </a:p>
@@ -11831,7 +11921,6 @@
           <a:p>
             <a:fld id="{9C4C9021-A16D-4E5C-A421-A5275F523D45}" type="slidenum">
               <a:rPr lang="zh-TW" altLang="en-US" smtClean="0"/>
-              <a:t>‹#›</a:t>
             </a:fld>
             <a:endParaRPr lang="zh-TW" altLang="en-US"/>
           </a:p>
@@ -11886,6 +11975,7 @@
               <a:rPr lang="zh-TW" altLang="en-US"/>
               <a:t>按一下以編輯母片標題樣式</a:t>
             </a:r>
+            <a:endParaRPr lang="zh-TW" altLang="en-US"/>
           </a:p>
         </p:txBody>
       </p:sp>
@@ -11950,6 +12040,7 @@
               <a:rPr lang="zh-TW" altLang="en-US"/>
               <a:t>按一下以編輯母片副標題樣式</a:t>
             </a:r>
+            <a:endParaRPr lang="zh-TW" altLang="en-US"/>
           </a:p>
         </p:txBody>
       </p:sp>
@@ -11977,7 +12068,6 @@
             </a:pPr>
             <a:fld id="{339EB788-0AD9-4E98-A516-64653248E3DB}" type="slidenum">
               <a:rPr lang="en-US" altLang="zh-TW"/>
-              <a:t>‹#›</a:t>
             </a:fld>
             <a:endParaRPr lang="en-US" altLang="zh-TW"/>
           </a:p>
@@ -12038,6 +12128,7 @@
               <a:rPr lang="zh-TW" altLang="en-US" dirty="0"/>
               <a:t>按一下以編輯母片標題樣式</a:t>
             </a:r>
+            <a:endParaRPr lang="zh-TW" altLang="en-US" dirty="0"/>
           </a:p>
         </p:txBody>
       </p:sp>
@@ -12097,6 +12188,7 @@
               <a:rPr lang="zh-TW" altLang="en-US" dirty="0"/>
               <a:t>按一下以編輯母片文字樣式</a:t>
             </a:r>
+            <a:endParaRPr lang="zh-TW" altLang="en-US" dirty="0"/>
           </a:p>
           <a:p>
             <a:pPr lvl="1"/>
@@ -12104,6 +12196,7 @@
               <a:rPr lang="zh-TW" altLang="en-US" dirty="0"/>
               <a:t>第二層</a:t>
             </a:r>
+            <a:endParaRPr lang="zh-TW" altLang="en-US" dirty="0"/>
           </a:p>
           <a:p>
             <a:pPr lvl="2"/>
@@ -12111,6 +12204,7 @@
               <a:rPr lang="zh-TW" altLang="en-US" dirty="0"/>
               <a:t>第三層</a:t>
             </a:r>
+            <a:endParaRPr lang="zh-TW" altLang="en-US" dirty="0"/>
           </a:p>
           <a:p>
             <a:pPr lvl="3"/>
@@ -12118,6 +12212,7 @@
               <a:rPr lang="zh-TW" altLang="en-US" dirty="0"/>
               <a:t>第四層</a:t>
             </a:r>
+            <a:endParaRPr lang="zh-TW" altLang="en-US" dirty="0"/>
           </a:p>
           <a:p>
             <a:pPr lvl="4"/>
@@ -12125,6 +12220,7 @@
               <a:rPr lang="zh-TW" altLang="en-US" dirty="0"/>
               <a:t>第五層</a:t>
             </a:r>
+            <a:endParaRPr lang="zh-TW" altLang="en-US" dirty="0"/>
           </a:p>
         </p:txBody>
       </p:sp>
@@ -12152,7 +12248,6 @@
             </a:pPr>
             <a:fld id="{01992E49-B35D-4BA4-A4A1-D07A03DA5610}" type="slidenum">
               <a:rPr lang="en-US" altLang="zh-TW"/>
-              <a:t>‹#›</a:t>
             </a:fld>
             <a:endParaRPr lang="en-US" altLang="zh-TW"/>
           </a:p>
@@ -12211,6 +12306,7 @@
               <a:rPr lang="zh-TW" altLang="en-US"/>
               <a:t>按一下以編輯母片標題樣式</a:t>
             </a:r>
+            <a:endParaRPr lang="zh-TW" altLang="en-US"/>
           </a:p>
         </p:txBody>
       </p:sp>
@@ -12276,6 +12372,7 @@
               <a:rPr lang="zh-TW" altLang="en-US"/>
               <a:t>按一下以編輯母片文字樣式</a:t>
             </a:r>
+            <a:endParaRPr lang="zh-TW" altLang="en-US"/>
           </a:p>
         </p:txBody>
       </p:sp>
@@ -12303,7 +12400,6 @@
             </a:pPr>
             <a:fld id="{B7F7D15B-E003-4EB9-A608-239C444D5E90}" type="slidenum">
               <a:rPr lang="en-US" altLang="zh-TW"/>
-              <a:t>‹#›</a:t>
             </a:fld>
             <a:endParaRPr lang="en-US" altLang="zh-TW"/>
           </a:p>
@@ -12353,6 +12449,7 @@
               <a:rPr lang="zh-TW" altLang="en-US"/>
               <a:t>按一下以編輯母片標題樣式</a:t>
             </a:r>
+            <a:endParaRPr lang="zh-TW" altLang="en-US"/>
           </a:p>
         </p:txBody>
       </p:sp>
@@ -12409,6 +12506,7 @@
               <a:rPr lang="zh-TW" altLang="en-US"/>
               <a:t>按一下以編輯母片文字樣式</a:t>
             </a:r>
+            <a:endParaRPr lang="zh-TW" altLang="en-US"/>
           </a:p>
           <a:p>
             <a:pPr lvl="1"/>
@@ -12416,6 +12514,7 @@
               <a:rPr lang="zh-TW" altLang="en-US"/>
               <a:t>第二層</a:t>
             </a:r>
+            <a:endParaRPr lang="zh-TW" altLang="en-US"/>
           </a:p>
           <a:p>
             <a:pPr lvl="2"/>
@@ -12423,6 +12522,7 @@
               <a:rPr lang="zh-TW" altLang="en-US"/>
               <a:t>第三層</a:t>
             </a:r>
+            <a:endParaRPr lang="zh-TW" altLang="en-US"/>
           </a:p>
           <a:p>
             <a:pPr lvl="3"/>
@@ -12430,6 +12530,7 @@
               <a:rPr lang="zh-TW" altLang="en-US"/>
               <a:t>第四層</a:t>
             </a:r>
+            <a:endParaRPr lang="zh-TW" altLang="en-US"/>
           </a:p>
           <a:p>
             <a:pPr lvl="4"/>
@@ -12437,6 +12538,7 @@
               <a:rPr lang="zh-TW" altLang="en-US"/>
               <a:t>第五層</a:t>
             </a:r>
+            <a:endParaRPr lang="zh-TW" altLang="en-US"/>
           </a:p>
         </p:txBody>
       </p:sp>
@@ -12493,6 +12595,7 @@
               <a:rPr lang="zh-TW" altLang="en-US"/>
               <a:t>按一下以編輯母片文字樣式</a:t>
             </a:r>
+            <a:endParaRPr lang="zh-TW" altLang="en-US"/>
           </a:p>
           <a:p>
             <a:pPr lvl="1"/>
@@ -12500,6 +12603,7 @@
               <a:rPr lang="zh-TW" altLang="en-US"/>
               <a:t>第二層</a:t>
             </a:r>
+            <a:endParaRPr lang="zh-TW" altLang="en-US"/>
           </a:p>
           <a:p>
             <a:pPr lvl="2"/>
@@ -12507,6 +12611,7 @@
               <a:rPr lang="zh-TW" altLang="en-US"/>
               <a:t>第三層</a:t>
             </a:r>
+            <a:endParaRPr lang="zh-TW" altLang="en-US"/>
           </a:p>
           <a:p>
             <a:pPr lvl="3"/>
@@ -12514,6 +12619,7 @@
               <a:rPr lang="zh-TW" altLang="en-US"/>
               <a:t>第四層</a:t>
             </a:r>
+            <a:endParaRPr lang="zh-TW" altLang="en-US"/>
           </a:p>
           <a:p>
             <a:pPr lvl="4"/>
@@ -12521,6 +12627,7 @@
               <a:rPr lang="zh-TW" altLang="en-US"/>
               <a:t>第五層</a:t>
             </a:r>
+            <a:endParaRPr lang="zh-TW" altLang="en-US"/>
           </a:p>
         </p:txBody>
       </p:sp>
@@ -12548,7 +12655,6 @@
             </a:pPr>
             <a:fld id="{86BC68BE-B4B0-4564-B8AC-726B6F10D4A3}" type="slidenum">
               <a:rPr lang="en-US" altLang="zh-TW"/>
-              <a:t>‹#›</a:t>
             </a:fld>
             <a:endParaRPr lang="en-US" altLang="zh-TW"/>
           </a:p>
@@ -12598,6 +12704,7 @@
               <a:rPr lang="zh-TW" altLang="en-US"/>
               <a:t>按一下以編輯母片標題樣式</a:t>
             </a:r>
+            <a:endParaRPr lang="zh-TW" altLang="en-US"/>
           </a:p>
         </p:txBody>
       </p:sp>
@@ -12625,7 +12732,6 @@
             </a:pPr>
             <a:fld id="{ED852E88-0254-4B19-81B3-E8664451FBCF}" type="slidenum">
               <a:rPr lang="zh-TW" altLang="en-US"/>
-              <a:t>‹#›</a:t>
             </a:fld>
             <a:endParaRPr lang="en-US" altLang="zh-TW"/>
           </a:p>
@@ -12688,6 +12794,7 @@
               <a:rPr lang="zh-TW" altLang="en-US" dirty="0"/>
               <a:t>按一下以編輯母片標題樣式</a:t>
             </a:r>
+            <a:endParaRPr lang="zh-TW" altLang="en-US" dirty="0"/>
           </a:p>
         </p:txBody>
       </p:sp>
@@ -12753,6 +12860,7 @@
               <a:rPr lang="zh-TW" altLang="en-US"/>
               <a:t>按一下以編輯母片文字樣式</a:t>
             </a:r>
+            <a:endParaRPr lang="zh-TW" altLang="en-US"/>
           </a:p>
         </p:txBody>
       </p:sp>
@@ -12809,6 +12917,7 @@
               <a:rPr lang="zh-TW" altLang="en-US"/>
               <a:t>按一下以編輯母片文字樣式</a:t>
             </a:r>
+            <a:endParaRPr lang="zh-TW" altLang="en-US"/>
           </a:p>
           <a:p>
             <a:pPr lvl="1"/>
@@ -12816,6 +12925,7 @@
               <a:rPr lang="zh-TW" altLang="en-US"/>
               <a:t>第二層</a:t>
             </a:r>
+            <a:endParaRPr lang="zh-TW" altLang="en-US"/>
           </a:p>
           <a:p>
             <a:pPr lvl="2"/>
@@ -12823,6 +12933,7 @@
               <a:rPr lang="zh-TW" altLang="en-US"/>
               <a:t>第三層</a:t>
             </a:r>
+            <a:endParaRPr lang="zh-TW" altLang="en-US"/>
           </a:p>
           <a:p>
             <a:pPr lvl="3"/>
@@ -12830,6 +12941,7 @@
               <a:rPr lang="zh-TW" altLang="en-US"/>
               <a:t>第四層</a:t>
             </a:r>
+            <a:endParaRPr lang="zh-TW" altLang="en-US"/>
           </a:p>
           <a:p>
             <a:pPr lvl="4"/>
@@ -12837,6 +12949,7 @@
               <a:rPr lang="zh-TW" altLang="en-US"/>
               <a:t>第五層</a:t>
             </a:r>
+            <a:endParaRPr lang="zh-TW" altLang="en-US"/>
           </a:p>
         </p:txBody>
       </p:sp>
@@ -12902,6 +13015,7 @@
               <a:rPr lang="zh-TW" altLang="en-US"/>
               <a:t>按一下以編輯母片文字樣式</a:t>
             </a:r>
+            <a:endParaRPr lang="zh-TW" altLang="en-US"/>
           </a:p>
         </p:txBody>
       </p:sp>
@@ -12958,6 +13072,7 @@
               <a:rPr lang="zh-TW" altLang="en-US"/>
               <a:t>按一下以編輯母片文字樣式</a:t>
             </a:r>
+            <a:endParaRPr lang="zh-TW" altLang="en-US"/>
           </a:p>
           <a:p>
             <a:pPr lvl="1"/>
@@ -12965,6 +13080,7 @@
               <a:rPr lang="zh-TW" altLang="en-US"/>
               <a:t>第二層</a:t>
             </a:r>
+            <a:endParaRPr lang="zh-TW" altLang="en-US"/>
           </a:p>
           <a:p>
             <a:pPr lvl="2"/>
@@ -12972,6 +13088,7 @@
               <a:rPr lang="zh-TW" altLang="en-US"/>
               <a:t>第三層</a:t>
             </a:r>
+            <a:endParaRPr lang="zh-TW" altLang="en-US"/>
           </a:p>
           <a:p>
             <a:pPr lvl="3"/>
@@ -12979,6 +13096,7 @@
               <a:rPr lang="zh-TW" altLang="en-US"/>
               <a:t>第四層</a:t>
             </a:r>
+            <a:endParaRPr lang="zh-TW" altLang="en-US"/>
           </a:p>
           <a:p>
             <a:pPr lvl="4"/>
@@ -12986,6 +13104,7 @@
               <a:rPr lang="zh-TW" altLang="en-US"/>
               <a:t>第五層</a:t>
             </a:r>
+            <a:endParaRPr lang="zh-TW" altLang="en-US"/>
           </a:p>
         </p:txBody>
       </p:sp>
@@ -13013,7 +13132,6 @@
             </a:pPr>
             <a:fld id="{338717D7-C8B0-44C5-A62F-3567BF53D398}" type="slidenum">
               <a:rPr lang="en-US" altLang="zh-TW"/>
-              <a:t>‹#›</a:t>
             </a:fld>
             <a:endParaRPr lang="en-US" altLang="zh-TW"/>
           </a:p>
@@ -13063,6 +13181,7 @@
               <a:rPr lang="zh-TW" altLang="en-US"/>
               <a:t>按一下以編輯母片標題樣式</a:t>
             </a:r>
+            <a:endParaRPr lang="zh-TW" altLang="en-US"/>
           </a:p>
         </p:txBody>
       </p:sp>
@@ -13090,7 +13209,6 @@
             </a:pPr>
             <a:fld id="{81FA067D-AD37-4A18-A34B-F0E66789EA77}" type="slidenum">
               <a:rPr lang="en-US" altLang="zh-TW"/>
-              <a:t>‹#›</a:t>
             </a:fld>
             <a:endParaRPr lang="en-US" altLang="zh-TW"/>
           </a:p>
@@ -13145,7 +13263,6 @@
             </a:pPr>
             <a:fld id="{FDA0777A-41B7-4B1E-A08A-E8D847463375}" type="slidenum">
               <a:rPr lang="en-US" altLang="zh-TW"/>
-              <a:t>‹#›</a:t>
             </a:fld>
             <a:endParaRPr lang="en-US" altLang="zh-TW"/>
           </a:p>
@@ -13204,6 +13321,7 @@
               <a:rPr lang="zh-TW" altLang="en-US"/>
               <a:t>按一下以編輯母片標題樣式</a:t>
             </a:r>
+            <a:endParaRPr lang="zh-TW" altLang="en-US"/>
           </a:p>
         </p:txBody>
       </p:sp>
@@ -13260,6 +13378,7 @@
               <a:rPr lang="zh-TW" altLang="en-US"/>
               <a:t>按一下以編輯母片文字樣式</a:t>
             </a:r>
+            <a:endParaRPr lang="zh-TW" altLang="en-US"/>
           </a:p>
           <a:p>
             <a:pPr lvl="1"/>
@@ -13267,6 +13386,7 @@
               <a:rPr lang="zh-TW" altLang="en-US"/>
               <a:t>第二層</a:t>
             </a:r>
+            <a:endParaRPr lang="zh-TW" altLang="en-US"/>
           </a:p>
           <a:p>
             <a:pPr lvl="2"/>
@@ -13274,6 +13394,7 @@
               <a:rPr lang="zh-TW" altLang="en-US"/>
               <a:t>第三層</a:t>
             </a:r>
+            <a:endParaRPr lang="zh-TW" altLang="en-US"/>
           </a:p>
           <a:p>
             <a:pPr lvl="3"/>
@@ -13281,6 +13402,7 @@
               <a:rPr lang="zh-TW" altLang="en-US"/>
               <a:t>第四層</a:t>
             </a:r>
+            <a:endParaRPr lang="zh-TW" altLang="en-US"/>
           </a:p>
           <a:p>
             <a:pPr lvl="4"/>
@@ -13288,6 +13410,7 @@
               <a:rPr lang="zh-TW" altLang="en-US"/>
               <a:t>第五層</a:t>
             </a:r>
+            <a:endParaRPr lang="zh-TW" altLang="en-US"/>
           </a:p>
         </p:txBody>
       </p:sp>
@@ -13353,6 +13476,7 @@
               <a:rPr lang="zh-TW" altLang="en-US"/>
               <a:t>按一下以編輯母片文字樣式</a:t>
             </a:r>
+            <a:endParaRPr lang="zh-TW" altLang="en-US"/>
           </a:p>
         </p:txBody>
       </p:sp>
@@ -13380,7 +13504,6 @@
             </a:pPr>
             <a:fld id="{4F993CA9-BA81-47AA-823D-8B709A5D2C45}" type="slidenum">
               <a:rPr lang="en-US" altLang="zh-TW"/>
-              <a:t>‹#›</a:t>
             </a:fld>
             <a:endParaRPr lang="en-US" altLang="zh-TW"/>
           </a:p>
@@ -13439,6 +13562,7 @@
               <a:rPr lang="zh-TW" altLang="en-US"/>
               <a:t>按一下以編輯母片標題樣式</a:t>
             </a:r>
+            <a:endParaRPr lang="zh-TW" altLang="en-US"/>
           </a:p>
         </p:txBody>
       </p:sp>
@@ -13566,6 +13690,7 @@
               <a:rPr lang="zh-TW" altLang="en-US"/>
               <a:t>按一下以編輯母片文字樣式</a:t>
             </a:r>
+            <a:endParaRPr lang="zh-TW" altLang="en-US"/>
           </a:p>
         </p:txBody>
       </p:sp>
@@ -13593,7 +13718,6 @@
             </a:pPr>
             <a:fld id="{E26ADD22-6B71-41C3-A3B2-EF9911ADB281}" type="slidenum">
               <a:rPr lang="en-US" altLang="zh-TW"/>
-              <a:t>‹#›</a:t>
             </a:fld>
             <a:endParaRPr lang="en-US" altLang="zh-TW"/>
           </a:p>
@@ -13643,6 +13767,7 @@
               <a:rPr lang="zh-TW" altLang="en-US"/>
               <a:t>按一下以編輯母片標題樣式</a:t>
             </a:r>
+            <a:endParaRPr lang="zh-TW" altLang="en-US"/>
           </a:p>
         </p:txBody>
       </p:sp>
@@ -13666,6 +13791,7 @@
               <a:rPr lang="zh-TW" altLang="en-US"/>
               <a:t>按一下以編輯母片文字樣式</a:t>
             </a:r>
+            <a:endParaRPr lang="zh-TW" altLang="en-US"/>
           </a:p>
           <a:p>
             <a:pPr lvl="1"/>
@@ -13673,6 +13799,7 @@
               <a:rPr lang="zh-TW" altLang="en-US"/>
               <a:t>第二層</a:t>
             </a:r>
+            <a:endParaRPr lang="zh-TW" altLang="en-US"/>
           </a:p>
           <a:p>
             <a:pPr lvl="2"/>
@@ -13680,6 +13807,7 @@
               <a:rPr lang="zh-TW" altLang="en-US"/>
               <a:t>第三層</a:t>
             </a:r>
+            <a:endParaRPr lang="zh-TW" altLang="en-US"/>
           </a:p>
           <a:p>
             <a:pPr lvl="3"/>
@@ -13687,6 +13815,7 @@
               <a:rPr lang="zh-TW" altLang="en-US"/>
               <a:t>第四層</a:t>
             </a:r>
+            <a:endParaRPr lang="zh-TW" altLang="en-US"/>
           </a:p>
           <a:p>
             <a:pPr lvl="4"/>
@@ -13694,6 +13823,7 @@
               <a:rPr lang="zh-TW" altLang="en-US"/>
               <a:t>第五層</a:t>
             </a:r>
+            <a:endParaRPr lang="zh-TW" altLang="en-US"/>
           </a:p>
         </p:txBody>
       </p:sp>
@@ -13721,7 +13851,6 @@
             </a:pPr>
             <a:fld id="{F39F7AEA-34EA-4C76-9A47-D6871C043AB0}" type="slidenum">
               <a:rPr lang="en-US" altLang="zh-TW"/>
-              <a:t>‹#›</a:t>
             </a:fld>
             <a:endParaRPr lang="en-US" altLang="zh-TW"/>
           </a:p>
@@ -13776,6 +13905,7 @@
               <a:rPr lang="zh-TW" altLang="en-US"/>
               <a:t>按一下以編輯母片標題樣式</a:t>
             </a:r>
+            <a:endParaRPr lang="zh-TW" altLang="en-US"/>
           </a:p>
         </p:txBody>
       </p:sp>
@@ -13804,6 +13934,7 @@
               <a:rPr lang="zh-TW" altLang="en-US"/>
               <a:t>按一下以編輯母片文字樣式</a:t>
             </a:r>
+            <a:endParaRPr lang="zh-TW" altLang="en-US"/>
           </a:p>
           <a:p>
             <a:pPr lvl="1"/>
@@ -13811,6 +13942,7 @@
               <a:rPr lang="zh-TW" altLang="en-US"/>
               <a:t>第二層</a:t>
             </a:r>
+            <a:endParaRPr lang="zh-TW" altLang="en-US"/>
           </a:p>
           <a:p>
             <a:pPr lvl="2"/>
@@ -13818,6 +13950,7 @@
               <a:rPr lang="zh-TW" altLang="en-US"/>
               <a:t>第三層</a:t>
             </a:r>
+            <a:endParaRPr lang="zh-TW" altLang="en-US"/>
           </a:p>
           <a:p>
             <a:pPr lvl="3"/>
@@ -13825,6 +13958,7 @@
               <a:rPr lang="zh-TW" altLang="en-US"/>
               <a:t>第四層</a:t>
             </a:r>
+            <a:endParaRPr lang="zh-TW" altLang="en-US"/>
           </a:p>
           <a:p>
             <a:pPr lvl="4"/>
@@ -13832,6 +13966,7 @@
               <a:rPr lang="zh-TW" altLang="en-US"/>
               <a:t>第五層</a:t>
             </a:r>
+            <a:endParaRPr lang="zh-TW" altLang="en-US"/>
           </a:p>
         </p:txBody>
       </p:sp>
@@ -13859,7 +13994,6 @@
             </a:pPr>
             <a:fld id="{530654D6-15C0-494A-B753-0640DB25B203}" type="slidenum">
               <a:rPr lang="en-US" altLang="zh-TW"/>
-              <a:t>‹#›</a:t>
             </a:fld>
             <a:endParaRPr lang="en-US" altLang="zh-TW"/>
           </a:p>
@@ -13915,6 +14049,7 @@
               <a:rPr lang="zh-TW" altLang="en-US"/>
               <a:t>按一下以編輯母片文字樣式</a:t>
             </a:r>
+            <a:endParaRPr lang="zh-TW" altLang="en-US"/>
           </a:p>
           <a:p>
             <a:pPr lvl="1"/>
@@ -13922,6 +14057,7 @@
               <a:rPr lang="zh-TW" altLang="en-US"/>
               <a:t>第二層</a:t>
             </a:r>
+            <a:endParaRPr lang="zh-TW" altLang="en-US"/>
           </a:p>
           <a:p>
             <a:pPr lvl="2"/>
@@ -13929,6 +14065,7 @@
               <a:rPr lang="zh-TW" altLang="en-US"/>
               <a:t>第三層</a:t>
             </a:r>
+            <a:endParaRPr lang="zh-TW" altLang="en-US"/>
           </a:p>
           <a:p>
             <a:pPr lvl="3"/>
@@ -13936,6 +14073,7 @@
               <a:rPr lang="zh-TW" altLang="en-US"/>
               <a:t>第四層</a:t>
             </a:r>
+            <a:endParaRPr lang="zh-TW" altLang="en-US"/>
           </a:p>
           <a:p>
             <a:pPr lvl="4"/>
@@ -13943,6 +14081,7 @@
               <a:rPr lang="zh-TW" altLang="en-US"/>
               <a:t>第五層</a:t>
             </a:r>
+            <a:endParaRPr lang="zh-TW" altLang="en-US"/>
           </a:p>
         </p:txBody>
       </p:sp>
@@ -13970,7 +14109,6 @@
             </a:pPr>
             <a:fld id="{B4502D48-BB1D-4132-8A0E-4D78DE52EF59}" type="slidenum">
               <a:rPr lang="en-US" altLang="zh-TW"/>
-              <a:t>‹#›</a:t>
             </a:fld>
             <a:endParaRPr lang="en-US" altLang="zh-TW"/>
           </a:p>
@@ -14025,7 +14163,6 @@
             </a:pPr>
             <a:fld id="{A71697D7-8013-4975-95E3-48F7F3F7499B}" type="slidenum">
               <a:rPr lang="zh-TW" altLang="en-US"/>
-              <a:t>‹#›</a:t>
             </a:fld>
             <a:endParaRPr lang="en-US" altLang="zh-TW"/>
           </a:p>
@@ -14084,6 +14221,7 @@
               <a:rPr lang="zh-TW" altLang="en-US"/>
               <a:t>按一下以編輯母片標題樣式</a:t>
             </a:r>
+            <a:endParaRPr lang="zh-TW" altLang="en-US"/>
           </a:p>
         </p:txBody>
       </p:sp>
@@ -14149,6 +14287,7 @@
               <a:rPr lang="zh-TW" altLang="en-US"/>
               <a:t>按一下以編輯母片文字樣式</a:t>
             </a:r>
+            <a:endParaRPr lang="zh-TW" altLang="en-US"/>
           </a:p>
         </p:txBody>
       </p:sp>
@@ -14176,7 +14315,6 @@
             </a:pPr>
             <a:fld id="{3FEA8A6C-E419-4A2D-A59F-0183255F70EA}" type="slidenum">
               <a:rPr lang="zh-TW" altLang="en-US"/>
-              <a:t>‹#›</a:t>
             </a:fld>
             <a:endParaRPr lang="en-US" altLang="zh-TW"/>
           </a:p>
@@ -14235,6 +14373,7 @@
               <a:rPr lang="zh-TW" altLang="en-US"/>
               <a:t>按一下以編輯母片標題樣式</a:t>
             </a:r>
+            <a:endParaRPr lang="zh-TW" altLang="en-US"/>
           </a:p>
         </p:txBody>
       </p:sp>
@@ -14362,6 +14501,7 @@
               <a:rPr lang="zh-TW" altLang="en-US"/>
               <a:t>按一下以編輯母片文字樣式</a:t>
             </a:r>
+            <a:endParaRPr lang="zh-TW" altLang="en-US"/>
           </a:p>
         </p:txBody>
       </p:sp>
@@ -14389,7 +14529,6 @@
             </a:pPr>
             <a:fld id="{8A8F0E97-51B7-4FFA-9BFC-ED098C10D8ED}" type="slidenum">
               <a:rPr lang="zh-TW" altLang="en-US"/>
-              <a:t>‹#›</a:t>
             </a:fld>
             <a:endParaRPr lang="en-US" altLang="zh-TW"/>
           </a:p>
@@ -14467,7 +14606,6 @@
             </a:pPr>
             <a:fld id="{3F21431A-0C06-4923-9B61-C55D1AEC9577}" type="slidenum">
               <a:rPr lang="zh-TW" altLang="en-US"/>
-              <a:t>‹#›</a:t>
             </a:fld>
             <a:endParaRPr lang="en-US" altLang="zh-TW"/>
           </a:p>
@@ -14517,6 +14655,13 @@
               </a:rPr>
               <a:t>誠信  承諾  創新  合作</a:t>
             </a:r>
+            <a:endParaRPr lang="zh-TW" altLang="en-US" sz="1000">
+              <a:solidFill>
+                <a:schemeClr val="bg2"/>
+              </a:solidFill>
+              <a:latin typeface="標楷體" panose="03000509000000000000" pitchFamily="65" charset="-120"/>
+              <a:ea typeface="標楷體" panose="03000509000000000000" pitchFamily="65" charset="-120"/>
+            </a:endParaRPr>
           </a:p>
         </p:txBody>
       </p:sp>
@@ -14605,7 +14750,7 @@
           <p:nvPr/>
         </p:nvPicPr>
         <p:blipFill>
-          <a:blip r:embed="rId13"/>
+          <a:blip r:embed="rId12"/>
           <a:srcRect/>
           <a:stretch>
             <a:fillRect/>
@@ -14661,6 +14806,7 @@
               <a:rPr lang="zh-TW" altLang="en-US"/>
               <a:t>按一下以編輯母片標題樣式</a:t>
             </a:r>
+            <a:endParaRPr lang="zh-TW" altLang="en-US"/>
           </a:p>
         </p:txBody>
       </p:sp>
@@ -14697,6 +14843,7 @@
               <a:rPr lang="zh-TW" altLang="en-US"/>
               <a:t>按一下以編輯母片</a:t>
             </a:r>
+            <a:endParaRPr lang="zh-TW" altLang="en-US"/>
           </a:p>
           <a:p>
             <a:pPr lvl="1"/>
@@ -14704,6 +14851,7 @@
               <a:rPr lang="zh-TW" altLang="en-US"/>
               <a:t>第二層</a:t>
             </a:r>
+            <a:endParaRPr lang="zh-TW" altLang="en-US"/>
           </a:p>
           <a:p>
             <a:pPr lvl="2"/>
@@ -14711,6 +14859,7 @@
               <a:rPr lang="zh-TW" altLang="en-US"/>
               <a:t>第三層</a:t>
             </a:r>
+            <a:endParaRPr lang="zh-TW" altLang="en-US"/>
           </a:p>
         </p:txBody>
       </p:sp>
@@ -15812,7 +15961,7 @@
           <p:nvPr/>
         </p:nvPicPr>
         <p:blipFill>
-          <a:blip r:embed="rId2">
+          <a:blip r:embed="rId1">
             <a:extLst>
               <a:ext uri="{28A0092B-C50C-407E-A947-70E740481C1C}">
                 <a14:useLocalDpi xmlns:a14="http://schemas.microsoft.com/office/drawing/2010/main" val="0"/>
@@ -15910,7 +16059,6 @@
                   <a:prstClr val="black"/>
                 </a:solidFill>
               </a:rPr>
-              <a:t>‹#›</a:t>
             </a:fld>
             <a:r>
               <a:rPr lang="zh-TW" altLang="en-US">
@@ -16115,6 +16263,7 @@
               <a:rPr lang="zh-TW" altLang="en-US"/>
               <a:t>按一下以編輯母片標題樣式</a:t>
             </a:r>
+            <a:endParaRPr lang="zh-TW" altLang="en-US"/>
           </a:p>
         </p:txBody>
       </p:sp>
@@ -16169,6 +16318,7 @@
               <a:rPr lang="zh-TW" altLang="en-US" dirty="0"/>
               <a:t>按一下以編輯母片</a:t>
             </a:r>
+            <a:endParaRPr lang="zh-TW" altLang="en-US" dirty="0"/>
           </a:p>
           <a:p>
             <a:pPr lvl="1"/>
@@ -16176,6 +16326,7 @@
               <a:rPr lang="zh-TW" altLang="en-US" dirty="0"/>
               <a:t>第二層</a:t>
             </a:r>
+            <a:endParaRPr lang="zh-TW" altLang="en-US" dirty="0"/>
           </a:p>
           <a:p>
             <a:pPr lvl="2"/>
@@ -16183,6 +16334,7 @@
               <a:rPr lang="zh-TW" altLang="en-US" dirty="0"/>
               <a:t>第三層</a:t>
             </a:r>
+            <a:endParaRPr lang="zh-TW" altLang="en-US" dirty="0"/>
           </a:p>
         </p:txBody>
       </p:sp>
@@ -16364,6 +16516,13 @@
               </a:rPr>
               <a:t>誠信  承諾  創新  合作</a:t>
             </a:r>
+            <a:endParaRPr lang="zh-TW" altLang="en-US" sz="975" b="1" dirty="0">
+              <a:solidFill>
+                <a:srgbClr val="808080"/>
+              </a:solidFill>
+              <a:latin typeface="微軟正黑體" panose="020B0604030504040204" pitchFamily="34" charset="-120"/>
+              <a:ea typeface="微軟正黑體" panose="020B0604030504040204" pitchFamily="34" charset="-120"/>
+            </a:endParaRPr>
           </a:p>
         </p:txBody>
       </p:sp>
@@ -16802,7 +16961,7 @@
           <p:nvPr/>
         </p:nvPicPr>
         <p:blipFill>
-          <a:blip r:embed="rId2">
+          <a:blip r:embed="rId1">
             <a:extLst>
               <a:ext uri="{28A0092B-C50C-407E-A947-70E740481C1C}">
                 <a14:useLocalDpi xmlns:a14="http://schemas.microsoft.com/office/drawing/2010/main" val="0"/>
@@ -16900,7 +17059,6 @@
                   <a:prstClr val="black"/>
                 </a:solidFill>
               </a:rPr>
-              <a:t>‹#›</a:t>
             </a:fld>
             <a:r>
               <a:rPr lang="zh-TW" altLang="en-US">
@@ -17105,6 +17263,7 @@
               <a:rPr lang="zh-TW" altLang="en-US"/>
               <a:t>按一下以編輯母片標題樣式</a:t>
             </a:r>
+            <a:endParaRPr lang="zh-TW" altLang="en-US"/>
           </a:p>
         </p:txBody>
       </p:sp>
@@ -17159,6 +17318,7 @@
               <a:rPr lang="zh-TW" altLang="en-US" dirty="0"/>
               <a:t>按一下以編輯母片</a:t>
             </a:r>
+            <a:endParaRPr lang="zh-TW" altLang="en-US" dirty="0"/>
           </a:p>
           <a:p>
             <a:pPr lvl="1"/>
@@ -17166,6 +17326,7 @@
               <a:rPr lang="zh-TW" altLang="en-US" dirty="0"/>
               <a:t>第二層</a:t>
             </a:r>
+            <a:endParaRPr lang="zh-TW" altLang="en-US" dirty="0"/>
           </a:p>
           <a:p>
             <a:pPr lvl="2"/>
@@ -17173,6 +17334,7 @@
               <a:rPr lang="zh-TW" altLang="en-US" dirty="0"/>
               <a:t>第三層</a:t>
             </a:r>
+            <a:endParaRPr lang="zh-TW" altLang="en-US" dirty="0"/>
           </a:p>
         </p:txBody>
       </p:sp>
@@ -17354,6 +17516,13 @@
               </a:rPr>
               <a:t>誠信  承諾  創新  合作</a:t>
             </a:r>
+            <a:endParaRPr lang="zh-TW" altLang="en-US" sz="975" b="1" dirty="0">
+              <a:solidFill>
+                <a:srgbClr val="808080"/>
+              </a:solidFill>
+              <a:latin typeface="微軟正黑體" panose="020B0604030504040204" pitchFamily="34" charset="-120"/>
+              <a:ea typeface="微軟正黑體" panose="020B0604030504040204" pitchFamily="34" charset="-120"/>
+            </a:endParaRPr>
           </a:p>
         </p:txBody>
       </p:sp>
@@ -17850,7 +18019,6 @@
                 </a:solidFill>
                 <a:ea typeface="新細明體" panose="02020500000000000000" charset="-120"/>
               </a:rPr>
-              <a:t>‹#›</a:t>
             </a:fld>
             <a:endParaRPr lang="en-US" altLang="zh-TW">
               <a:solidFill>
@@ -17932,6 +18100,13 @@
               </a:rPr>
               <a:t>誠信  承諾  創新  合作</a:t>
             </a:r>
+            <a:endParaRPr lang="zh-TW" altLang="en-US" sz="1000">
+              <a:solidFill>
+                <a:srgbClr val="808080"/>
+              </a:solidFill>
+              <a:latin typeface="標楷體" panose="03000509000000000000" pitchFamily="65" charset="-120"/>
+              <a:ea typeface="標楷體" panose="03000509000000000000" pitchFamily="65" charset="-120"/>
+            </a:endParaRPr>
           </a:p>
         </p:txBody>
       </p:sp>
@@ -18052,7 +18227,7 @@
           <p:nvPr/>
         </p:nvPicPr>
         <p:blipFill>
-          <a:blip r:embed="rId13">
+          <a:blip r:embed="rId12">
             <a:extLst>
               <a:ext uri="{28A0092B-C50C-407E-A947-70E740481C1C}">
                 <a14:useLocalDpi xmlns:a14="http://schemas.microsoft.com/office/drawing/2010/main" val="0"/>
@@ -18145,6 +18320,7 @@
               <a:rPr lang="zh-TW" altLang="en-US"/>
               <a:t>按一下以編輯母片標題樣式</a:t>
             </a:r>
+            <a:endParaRPr lang="zh-TW" altLang="en-US"/>
           </a:p>
         </p:txBody>
       </p:sp>
@@ -18209,6 +18385,7 @@
               <a:rPr lang="zh-TW" altLang="en-US"/>
               <a:t>按一下以編輯母片</a:t>
             </a:r>
+            <a:endParaRPr lang="zh-TW" altLang="en-US"/>
           </a:p>
           <a:p>
             <a:pPr lvl="1"/>
@@ -18216,6 +18393,7 @@
               <a:rPr lang="zh-TW" altLang="en-US"/>
               <a:t>第二層</a:t>
             </a:r>
+            <a:endParaRPr lang="zh-TW" altLang="en-US"/>
           </a:p>
           <a:p>
             <a:pPr lvl="2"/>
@@ -18223,6 +18401,7 @@
               <a:rPr lang="zh-TW" altLang="en-US"/>
               <a:t>第三層</a:t>
             </a:r>
+            <a:endParaRPr lang="zh-TW" altLang="en-US"/>
           </a:p>
         </p:txBody>
       </p:sp>
@@ -19341,6 +19520,7 @@
               <a:rPr lang="zh-TW" altLang="en-US"/>
               <a:t>按一下以編輯母片標題樣式</a:t>
             </a:r>
+            <a:endParaRPr lang="zh-TW" altLang="en-US"/>
           </a:p>
         </p:txBody>
       </p:sp>
@@ -19374,6 +19554,7 @@
               <a:rPr lang="zh-TW" altLang="en-US"/>
               <a:t>按一下以編輯母片文字樣式</a:t>
             </a:r>
+            <a:endParaRPr lang="zh-TW" altLang="en-US"/>
           </a:p>
           <a:p>
             <a:pPr lvl="1"/>
@@ -19381,6 +19562,7 @@
               <a:rPr lang="zh-TW" altLang="en-US"/>
               <a:t>第二層</a:t>
             </a:r>
+            <a:endParaRPr lang="zh-TW" altLang="en-US"/>
           </a:p>
           <a:p>
             <a:pPr lvl="2"/>
@@ -19388,6 +19570,7 @@
               <a:rPr lang="zh-TW" altLang="en-US"/>
               <a:t>第三層</a:t>
             </a:r>
+            <a:endParaRPr lang="zh-TW" altLang="en-US"/>
           </a:p>
           <a:p>
             <a:pPr lvl="3"/>
@@ -19395,6 +19578,7 @@
               <a:rPr lang="zh-TW" altLang="en-US"/>
               <a:t>第四層</a:t>
             </a:r>
+            <a:endParaRPr lang="zh-TW" altLang="en-US"/>
           </a:p>
           <a:p>
             <a:pPr lvl="4"/>
@@ -19402,6 +19586,7 @@
               <a:rPr lang="zh-TW" altLang="en-US"/>
               <a:t>第五層</a:t>
             </a:r>
+            <a:endParaRPr lang="zh-TW" altLang="en-US"/>
           </a:p>
         </p:txBody>
       </p:sp>
@@ -19440,7 +19625,6 @@
           <a:p>
             <a:fld id="{388997FB-EFBE-4ED6-A43F-DDA1512FD57C}" type="datetimeFigureOut">
               <a:rPr lang="zh-TW" altLang="en-US" smtClean="0"/>
-              <a:t>2026/4/30</a:t>
             </a:fld>
             <a:endParaRPr lang="zh-TW" altLang="en-US"/>
           </a:p>
@@ -19518,7 +19702,6 @@
           <a:p>
             <a:fld id="{13C0E97A-62D1-41C7-936F-199E295F9AB2}" type="slidenum">
               <a:rPr lang="zh-TW" altLang="en-US" smtClean="0"/>
-              <a:t>‹#›</a:t>
             </a:fld>
             <a:endParaRPr lang="zh-TW" altLang="en-US"/>
           </a:p>
@@ -19861,7 +20044,6 @@
                   <a:srgbClr val="000000"/>
                 </a:solidFill>
               </a:rPr>
-              <a:t>‹#›</a:t>
             </a:fld>
             <a:endParaRPr lang="en-US" altLang="zh-TW">
               <a:solidFill>
@@ -19915,6 +20097,13 @@
               </a:rPr>
               <a:t>誠信  承諾  創新  合作</a:t>
             </a:r>
+            <a:endParaRPr lang="zh-TW" altLang="en-US" sz="1000">
+              <a:solidFill>
+                <a:srgbClr val="808080"/>
+              </a:solidFill>
+              <a:latin typeface="標楷體" panose="03000509000000000000" pitchFamily="65" charset="-120"/>
+              <a:ea typeface="標楷體" panose="03000509000000000000" pitchFamily="65" charset="-120"/>
+            </a:endParaRPr>
           </a:p>
         </p:txBody>
       </p:sp>
@@ -20009,7 +20198,7 @@
           <p:nvPr/>
         </p:nvPicPr>
         <p:blipFill>
-          <a:blip r:embed="rId13"/>
+          <a:blip r:embed="rId12"/>
           <a:srcRect/>
           <a:stretch>
             <a:fillRect/>
@@ -20065,6 +20254,7 @@
               <a:rPr lang="zh-TW" altLang="en-US"/>
               <a:t>按一下以編輯母片標題樣式</a:t>
             </a:r>
+            <a:endParaRPr lang="zh-TW" altLang="en-US"/>
           </a:p>
         </p:txBody>
       </p:sp>
@@ -20101,6 +20291,7 @@
               <a:rPr lang="zh-TW" altLang="en-US"/>
               <a:t>按一下以編輯母片</a:t>
             </a:r>
+            <a:endParaRPr lang="zh-TW" altLang="en-US"/>
           </a:p>
           <a:p>
             <a:pPr lvl="1"/>
@@ -20108,6 +20299,7 @@
               <a:rPr lang="zh-TW" altLang="en-US"/>
               <a:t>第二層</a:t>
             </a:r>
+            <a:endParaRPr lang="zh-TW" altLang="en-US"/>
           </a:p>
           <a:p>
             <a:pPr lvl="2"/>
@@ -20115,6 +20307,7 @@
               <a:rPr lang="zh-TW" altLang="en-US"/>
               <a:t>第三層</a:t>
             </a:r>
+            <a:endParaRPr lang="zh-TW" altLang="en-US"/>
           </a:p>
         </p:txBody>
       </p:sp>
@@ -21233,6 +21426,7 @@
               <a:rPr lang="zh-TW" altLang="en-US"/>
               <a:t>按一下以編輯母片標題樣式</a:t>
             </a:r>
+            <a:endParaRPr lang="zh-TW" altLang="en-US"/>
           </a:p>
         </p:txBody>
       </p:sp>
@@ -21266,6 +21460,7 @@
               <a:rPr lang="zh-TW" altLang="en-US"/>
               <a:t>按一下以編輯母片文字樣式</a:t>
             </a:r>
+            <a:endParaRPr lang="zh-TW" altLang="en-US"/>
           </a:p>
           <a:p>
             <a:pPr lvl="1"/>
@@ -21273,6 +21468,7 @@
               <a:rPr lang="zh-TW" altLang="en-US"/>
               <a:t>第二層</a:t>
             </a:r>
+            <a:endParaRPr lang="zh-TW" altLang="en-US"/>
           </a:p>
           <a:p>
             <a:pPr lvl="2"/>
@@ -21280,6 +21476,7 @@
               <a:rPr lang="zh-TW" altLang="en-US"/>
               <a:t>第三層</a:t>
             </a:r>
+            <a:endParaRPr lang="zh-TW" altLang="en-US"/>
           </a:p>
           <a:p>
             <a:pPr lvl="3"/>
@@ -21287,6 +21484,7 @@
               <a:rPr lang="zh-TW" altLang="en-US"/>
               <a:t>第四層</a:t>
             </a:r>
+            <a:endParaRPr lang="zh-TW" altLang="en-US"/>
           </a:p>
           <a:p>
             <a:pPr lvl="4"/>
@@ -21294,6 +21492,7 @@
               <a:rPr lang="zh-TW" altLang="en-US"/>
               <a:t>第五層</a:t>
             </a:r>
+            <a:endParaRPr lang="zh-TW" altLang="en-US"/>
           </a:p>
         </p:txBody>
       </p:sp>
@@ -21332,7 +21531,6 @@
           <a:p>
             <a:fld id="{79EFF09E-4EA0-4518-A9E8-449DE34F8B74}" type="datetimeFigureOut">
               <a:rPr lang="zh-TW" altLang="en-US" smtClean="0"/>
-              <a:t>2026/4/30</a:t>
             </a:fld>
             <a:endParaRPr lang="zh-TW" altLang="en-US"/>
           </a:p>
@@ -21410,7 +21608,6 @@
           <a:p>
             <a:fld id="{9C4C9021-A16D-4E5C-A421-A5275F523D45}" type="slidenum">
               <a:rPr lang="zh-TW" altLang="en-US" smtClean="0"/>
-              <a:t>‹#›</a:t>
             </a:fld>
             <a:endParaRPr lang="zh-TW" altLang="en-US"/>
           </a:p>
@@ -21719,7 +21916,7 @@
           <p:nvPr/>
         </p:nvPicPr>
         <p:blipFill>
-          <a:blip r:embed="rId2">
+          <a:blip r:embed="rId1">
             <a:extLst>
               <a:ext uri="{28A0092B-C50C-407E-A947-70E740481C1C}">
                 <a14:useLocalDpi xmlns:a14="http://schemas.microsoft.com/office/drawing/2010/main" val="0"/>
@@ -21820,7 +22017,6 @@
                   <a:prstClr val="black"/>
                 </a:solidFill>
               </a:rPr>
-              <a:t>‹#›</a:t>
             </a:fld>
             <a:r>
               <a:rPr lang="zh-TW" altLang="en-US">
@@ -22025,6 +22221,7 @@
               <a:rPr lang="zh-TW" altLang="en-US"/>
               <a:t>按一下以編輯母片標題樣式</a:t>
             </a:r>
+            <a:endParaRPr lang="zh-TW" altLang="en-US"/>
           </a:p>
         </p:txBody>
       </p:sp>
@@ -22079,6 +22276,7 @@
               <a:rPr lang="zh-TW" altLang="en-US" dirty="0"/>
               <a:t>按一下以編輯母片</a:t>
             </a:r>
+            <a:endParaRPr lang="zh-TW" altLang="en-US" dirty="0"/>
           </a:p>
           <a:p>
             <a:pPr lvl="1"/>
@@ -22086,6 +22284,7 @@
               <a:rPr lang="zh-TW" altLang="en-US" dirty="0"/>
               <a:t>第二層</a:t>
             </a:r>
+            <a:endParaRPr lang="zh-TW" altLang="en-US" dirty="0"/>
           </a:p>
           <a:p>
             <a:pPr lvl="2"/>
@@ -22093,6 +22292,7 @@
               <a:rPr lang="zh-TW" altLang="en-US" dirty="0"/>
               <a:t>第三層</a:t>
             </a:r>
+            <a:endParaRPr lang="zh-TW" altLang="en-US" dirty="0"/>
           </a:p>
         </p:txBody>
       </p:sp>
@@ -22274,6 +22474,13 @@
               </a:rPr>
               <a:t>誠信  承諾  創新  合作</a:t>
             </a:r>
+            <a:endParaRPr lang="zh-TW" altLang="en-US" sz="975" b="1" dirty="0">
+              <a:solidFill>
+                <a:srgbClr val="808080"/>
+              </a:solidFill>
+              <a:latin typeface="微軟正黑體" panose="020B0604030504040204" pitchFamily="34" charset="-120"/>
+              <a:ea typeface="微軟正黑體" panose="020B0604030504040204" pitchFamily="34" charset="-120"/>
+            </a:endParaRPr>
           </a:p>
         </p:txBody>
       </p:sp>
@@ -22774,7 +22981,6 @@
             </a:pPr>
             <a:fld id="{A9CD9766-93A3-4E76-9B20-A4D620225CC1}" type="slidenum">
               <a:rPr lang="en-US" altLang="zh-TW"/>
-              <a:t>‹#›</a:t>
             </a:fld>
             <a:endParaRPr lang="en-US" altLang="zh-TW" dirty="0"/>
           </a:p>
@@ -22954,6 +23160,12 @@
               </a:rPr>
               <a:t>誠信  承諾  創新  合作</a:t>
             </a:r>
+            <a:endParaRPr lang="zh-TW" altLang="en-US" sz="1000">
+              <a:solidFill>
+                <a:schemeClr val="bg2"/>
+              </a:solidFill>
+              <a:latin typeface="標楷體" panose="03000509000000000000" pitchFamily="65" charset="-120"/>
+            </a:endParaRPr>
           </a:p>
         </p:txBody>
       </p:sp>
@@ -23064,7 +23276,7 @@
           <p:nvPr/>
         </p:nvPicPr>
         <p:blipFill>
-          <a:blip r:embed="rId14" cstate="print">
+          <a:blip r:embed="rId13" cstate="print">
             <a:extLst>
               <a:ext uri="{28A0092B-C50C-407E-A947-70E740481C1C}">
                 <a14:useLocalDpi xmlns:a14="http://schemas.microsoft.com/office/drawing/2010/main" val="0"/>
@@ -23170,6 +23382,7 @@
               <a:rPr lang="zh-TW" altLang="en-US" dirty="0"/>
               <a:t>按一下以編輯母片標題樣式</a:t>
             </a:r>
+            <a:endParaRPr lang="zh-TW" altLang="en-US" dirty="0"/>
           </a:p>
         </p:txBody>
       </p:sp>
@@ -23234,6 +23447,7 @@
               <a:rPr lang="zh-TW" altLang="en-US" dirty="0"/>
               <a:t>按一下以編輯母片</a:t>
             </a:r>
+            <a:endParaRPr lang="zh-TW" altLang="en-US" dirty="0"/>
           </a:p>
           <a:p>
             <a:pPr lvl="1"/>
@@ -23241,6 +23455,7 @@
               <a:rPr lang="zh-TW" altLang="en-US" dirty="0"/>
               <a:t>第二層</a:t>
             </a:r>
+            <a:endParaRPr lang="zh-TW" altLang="en-US" dirty="0"/>
           </a:p>
           <a:p>
             <a:pPr lvl="2"/>
@@ -23248,6 +23463,7 @@
               <a:rPr lang="zh-TW" altLang="en-US" dirty="0"/>
               <a:t>第三層</a:t>
             </a:r>
+            <a:endParaRPr lang="zh-TW" altLang="en-US" dirty="0"/>
           </a:p>
         </p:txBody>
       </p:sp>
@@ -23702,7 +23918,7 @@
           <p:nvPr/>
         </p:nvPicPr>
         <p:blipFill>
-          <a:blip r:embed="rId2">
+          <a:blip r:embed="rId1">
             <a:extLst>
               <a:ext uri="{28A0092B-C50C-407E-A947-70E740481C1C}">
                 <a14:useLocalDpi xmlns:a14="http://schemas.microsoft.com/office/drawing/2010/main" val="0"/>
@@ -23800,7 +24016,6 @@
                   <a:prstClr val="black"/>
                 </a:solidFill>
               </a:rPr>
-              <a:t>‹#›</a:t>
             </a:fld>
             <a:r>
               <a:rPr lang="zh-TW" altLang="en-US">
@@ -24005,6 +24220,7 @@
               <a:rPr lang="zh-TW" altLang="en-US"/>
               <a:t>按一下以編輯母片標題樣式</a:t>
             </a:r>
+            <a:endParaRPr lang="zh-TW" altLang="en-US"/>
           </a:p>
         </p:txBody>
       </p:sp>
@@ -24059,6 +24275,7 @@
               <a:rPr lang="zh-TW" altLang="en-US" dirty="0"/>
               <a:t>按一下以編輯母片</a:t>
             </a:r>
+            <a:endParaRPr lang="zh-TW" altLang="en-US" dirty="0"/>
           </a:p>
           <a:p>
             <a:pPr lvl="1"/>
@@ -24066,6 +24283,7 @@
               <a:rPr lang="zh-TW" altLang="en-US" dirty="0"/>
               <a:t>第二層</a:t>
             </a:r>
+            <a:endParaRPr lang="zh-TW" altLang="en-US" dirty="0"/>
           </a:p>
           <a:p>
             <a:pPr lvl="2"/>
@@ -24073,6 +24291,7 @@
               <a:rPr lang="zh-TW" altLang="en-US" dirty="0"/>
               <a:t>第三層</a:t>
             </a:r>
+            <a:endParaRPr lang="zh-TW" altLang="en-US" dirty="0"/>
           </a:p>
         </p:txBody>
       </p:sp>
@@ -24254,6 +24473,13 @@
               </a:rPr>
               <a:t>誠信  承諾  創新  合作</a:t>
             </a:r>
+            <a:endParaRPr lang="zh-TW" altLang="en-US" sz="975" b="1" dirty="0">
+              <a:solidFill>
+                <a:srgbClr val="808080"/>
+              </a:solidFill>
+              <a:latin typeface="微軟正黑體" panose="020B0604030504040204" pitchFamily="34" charset="-120"/>
+              <a:ea typeface="微軟正黑體" panose="020B0604030504040204" pitchFamily="34" charset="-120"/>
+            </a:endParaRPr>
           </a:p>
         </p:txBody>
       </p:sp>
@@ -24692,7 +24918,7 @@
           <p:nvPr/>
         </p:nvPicPr>
         <p:blipFill>
-          <a:blip r:embed="rId2">
+          <a:blip r:embed="rId1">
             <a:extLst>
               <a:ext uri="{28A0092B-C50C-407E-A947-70E740481C1C}">
                 <a14:useLocalDpi xmlns:a14="http://schemas.microsoft.com/office/drawing/2010/main" val="0"/>
@@ -24790,7 +25016,6 @@
                   <a:prstClr val="black"/>
                 </a:solidFill>
               </a:rPr>
-              <a:t>‹#›</a:t>
             </a:fld>
             <a:r>
               <a:rPr lang="zh-TW" altLang="en-US">
@@ -24995,6 +25220,7 @@
               <a:rPr lang="zh-TW" altLang="en-US"/>
               <a:t>按一下以編輯母片標題樣式</a:t>
             </a:r>
+            <a:endParaRPr lang="zh-TW" altLang="en-US"/>
           </a:p>
         </p:txBody>
       </p:sp>
@@ -25049,6 +25275,7 @@
               <a:rPr lang="zh-TW" altLang="en-US" dirty="0"/>
               <a:t>按一下以編輯母片</a:t>
             </a:r>
+            <a:endParaRPr lang="zh-TW" altLang="en-US" dirty="0"/>
           </a:p>
           <a:p>
             <a:pPr lvl="1"/>
@@ -25056,6 +25283,7 @@
               <a:rPr lang="zh-TW" altLang="en-US" dirty="0"/>
               <a:t>第二層</a:t>
             </a:r>
+            <a:endParaRPr lang="zh-TW" altLang="en-US" dirty="0"/>
           </a:p>
           <a:p>
             <a:pPr lvl="2"/>
@@ -25063,6 +25291,7 @@
               <a:rPr lang="zh-TW" altLang="en-US" dirty="0"/>
               <a:t>第三層</a:t>
             </a:r>
+            <a:endParaRPr lang="zh-TW" altLang="en-US" dirty="0"/>
           </a:p>
         </p:txBody>
       </p:sp>
@@ -25244,6 +25473,13 @@
               </a:rPr>
               <a:t>誠信  承諾  創新  合作</a:t>
             </a:r>
+            <a:endParaRPr lang="zh-TW" altLang="en-US" sz="975" b="1" dirty="0">
+              <a:solidFill>
+                <a:srgbClr val="808080"/>
+              </a:solidFill>
+              <a:latin typeface="微軟正黑體" panose="020B0604030504040204" pitchFamily="34" charset="-120"/>
+              <a:ea typeface="微軟正黑體" panose="020B0604030504040204" pitchFamily="34" charset="-120"/>
+            </a:endParaRPr>
           </a:p>
         </p:txBody>
       </p:sp>
@@ -25694,6 +25930,7 @@
               <a:rPr lang="en-US" altLang="zh-TW" sz="2500" dirty="0"/>
               <a:t>TWD IRS pay 6s, rec 2y</a:t>
             </a:r>
+            <a:endParaRPr lang="en-US" altLang="zh-TW" sz="2500" dirty="0"/>
           </a:p>
         </p:txBody>
       </p:sp>
@@ -25785,6 +26022,13 @@
               </a:rPr>
               <a:t>認為央行貨幣政策最終不如市場預期激進</a:t>
             </a:r>
+            <a:endParaRPr kumimoji="0" lang="zh-TW" altLang="en-US" sz="1600" b="1" dirty="0">
+              <a:solidFill>
+                <a:srgbClr val="FFFFFF"/>
+              </a:solidFill>
+              <a:latin typeface="微軟正黑體" panose="020B0604030504040204" pitchFamily="34" charset="-120"/>
+              <a:ea typeface="微軟正黑體" panose="020B0604030504040204" pitchFamily="34" charset="-120"/>
+            </a:endParaRPr>
           </a:p>
         </p:txBody>
       </p:sp>
@@ -25983,6 +26227,10 @@
               </a:rPr>
               <a:t>楊金龍：關鍵在第二季</a:t>
             </a:r>
+            <a:endParaRPr lang="zh-TW" altLang="en-US" sz="2000" dirty="0">
+              <a:latin typeface="+mj-ea"/>
+              <a:ea typeface="+mj-ea"/>
+            </a:endParaRPr>
           </a:p>
           <a:p>
             <a:pPr marL="0" indent="0">
@@ -26009,6 +26257,10 @@
               </a:rPr>
               <a:t>預防央行預防性升息</a:t>
             </a:r>
+            <a:endParaRPr lang="zh-TW" altLang="en-US" sz="2000" dirty="0">
+              <a:latin typeface="+mj-ea"/>
+              <a:ea typeface="+mj-ea"/>
+            </a:endParaRPr>
           </a:p>
           <a:p>
             <a:endParaRPr lang="zh-TW" altLang="en-US" sz="1000" dirty="0">
@@ -26038,6 +26290,10 @@
               </a:rPr>
               <a:t>隱含未來升息路徑過於激進</a:t>
             </a:r>
+            <a:endParaRPr lang="zh-TW" altLang="en-US" sz="2000" dirty="0">
+              <a:latin typeface="+mj-ea"/>
+              <a:ea typeface="+mj-ea"/>
+            </a:endParaRPr>
           </a:p>
           <a:p>
             <a:pPr marL="0" indent="0">
@@ -26064,6 +26320,10 @@
               </a:rPr>
               <a:t>利率</a:t>
             </a:r>
+            <a:endParaRPr lang="zh-TW" altLang="en-US" sz="2000" dirty="0">
+              <a:latin typeface="+mj-ea"/>
+              <a:ea typeface="+mj-ea"/>
+            </a:endParaRPr>
           </a:p>
           <a:p>
             <a:pPr marL="0" indent="0">
@@ -26104,6 +26364,10 @@
               </a:rPr>
               <a:t>overreaction</a:t>
             </a:r>
+            <a:endParaRPr lang="en-US" altLang="zh-TW" sz="2000" dirty="0">
+              <a:latin typeface="+mj-ea"/>
+              <a:ea typeface="+mj-ea"/>
+            </a:endParaRPr>
           </a:p>
           <a:p>
             <a:endParaRPr lang="zh-TW" altLang="en-US" sz="2000" dirty="0">
@@ -26126,6 +26390,10 @@
               </a:rPr>
               <a:t>目前各年期利率</a:t>
             </a:r>
+            <a:endParaRPr lang="zh-TW" altLang="en-US" sz="2000" dirty="0">
+              <a:latin typeface="+mj-ea"/>
+              <a:ea typeface="+mj-ea"/>
+            </a:endParaRPr>
           </a:p>
           <a:p>
             <a:pPr lvl="1"/>
@@ -26150,6 +26418,10 @@
               </a:rPr>
               <a:t>1.678%</a:t>
             </a:r>
+            <a:endParaRPr lang="en-US" altLang="zh-TW" sz="1600" dirty="0">
+              <a:latin typeface="+mj-ea"/>
+              <a:ea typeface="+mj-ea"/>
+            </a:endParaRPr>
           </a:p>
           <a:p>
             <a:pPr lvl="1"/>
@@ -26172,8 +26444,12 @@
                 <a:latin typeface="+mj-ea"/>
                 <a:ea typeface="+mj-ea"/>
               </a:rPr>
-              <a:t>1.71%</a:t>
-            </a:r>
+              <a:t>1.715%</a:t>
+            </a:r>
+            <a:endParaRPr lang="en-US" altLang="zh-TW" sz="1600" dirty="0">
+              <a:latin typeface="+mj-ea"/>
+              <a:ea typeface="+mj-ea"/>
+            </a:endParaRPr>
           </a:p>
           <a:p>
             <a:pPr lvl="1"/>
@@ -26198,6 +26474,10 @@
               </a:rPr>
               <a:t>1.805%</a:t>
             </a:r>
+            <a:endParaRPr lang="en-US" altLang="zh-TW" sz="1600" dirty="0">
+              <a:latin typeface="+mj-ea"/>
+              <a:ea typeface="+mj-ea"/>
+            </a:endParaRPr>
           </a:p>
           <a:p>
             <a:pPr lvl="1"/>
@@ -26220,8 +26500,12 @@
                 <a:latin typeface="+mj-ea"/>
                 <a:ea typeface="+mj-ea"/>
               </a:rPr>
-              <a:t>2.0%</a:t>
-            </a:r>
+              <a:t>2.00%</a:t>
+            </a:r>
+            <a:endParaRPr lang="en-US" altLang="zh-TW" sz="1600" dirty="0">
+              <a:latin typeface="+mj-ea"/>
+              <a:ea typeface="+mj-ea"/>
+            </a:endParaRPr>
           </a:p>
           <a:p>
             <a:pPr marL="457200" lvl="1" indent="0">
@@ -26234,6 +26518,10 @@
               </a:rPr>
               <a:t>      </a:t>
             </a:r>
+            <a:endParaRPr lang="en-US" altLang="zh-TW" sz="1600" dirty="0">
+              <a:latin typeface="+mj-ea"/>
+              <a:ea typeface="+mj-ea"/>
+            </a:endParaRPr>
           </a:p>
           <a:p>
             <a:pPr lvl="1"/>
@@ -26268,23 +26556,17 @@
       </p:sp>
       <p:graphicFrame>
         <p:nvGraphicFramePr>
-          <p:cNvPr id="6" name="圖表 5"/>
+          <p:cNvPr id="4" name="圖表 3"/>
           <p:cNvGraphicFramePr/>
-          <p:nvPr>
-            <p:extLst>
-              <p:ext uri="{D42A27DB-BD31-4B8C-83A1-F6EECF244321}">
-                <p14:modId xmlns:p14="http://schemas.microsoft.com/office/powerpoint/2010/main" val="2567177249"/>
-              </p:ext>
-            </p:extLst>
-          </p:nvPr>
+          <p:nvPr/>
         </p:nvGraphicFramePr>
         <p:xfrm>
-          <a:off x="3582035" y="3444240"/>
-          <a:ext cx="5307965" cy="3361690"/>
+          <a:off x="3519170" y="3406775"/>
+          <a:ext cx="5472430" cy="3404235"/>
         </p:xfrm>
         <a:graphic>
           <a:graphicData uri="http://schemas.openxmlformats.org/drawingml/2006/chart">
-            <c:chart xmlns:c="http://schemas.openxmlformats.org/drawingml/2006/chart" xmlns:r="http://schemas.openxmlformats.org/officeDocument/2006/relationships" r:id="rId2"/>
+            <c:chart xmlns:c="http://schemas.openxmlformats.org/drawingml/2006/chart" xmlns:r="http://schemas.openxmlformats.org/officeDocument/2006/relationships" r:id="rId1"/>
           </a:graphicData>
         </a:graphic>
       </p:graphicFrame>
@@ -26516,7 +26798,6 @@
       </a:bgFillStyleLst>
     </a:fmtScheme>
   </a:themeElements>
-  <a:objectDefaults/>
   <a:extraClrSchemeLst>
     <a:extraClrScheme>
       <a:clrScheme name="3_自訂設計 1">
@@ -28897,8 +29178,6 @@
       </a:bgFillStyleLst>
     </a:fmtScheme>
   </a:themeElements>
-  <a:objectDefaults/>
-  <a:extraClrSchemeLst/>
   <a:extLst>
     <a:ext uri="{05A4C25C-085E-4340-85A3-A5531E510DB2}">
       <thm15:themeFamily xmlns:thm15="http://schemas.microsoft.com/office/thememl/2012/main" name="Office Theme" id="{62F939B6-93AF-4DB8-9C6B-D6C7DFDC589F}" vid="{4A3C46E8-61CC-4603-A589-7422A47A8E4A}"/>
@@ -29185,8 +29464,6 @@
       </a:bgFillStyleLst>
     </a:fmtScheme>
   </a:themeElements>
-  <a:objectDefaults/>
-  <a:extraClrSchemeLst/>
   <a:extLst>
     <a:ext uri="{05A4C25C-085E-4340-85A3-A5531E510DB2}">
       <thm15:themeFamily xmlns:thm15="http://schemas.microsoft.com/office/thememl/2012/main" name="Office Theme" id="{62F939B6-93AF-4DB8-9C6B-D6C7DFDC589F}" vid="{4A3C46E8-61CC-4603-A589-7422A47A8E4A}"/>
@@ -29415,7 +29692,6 @@
       </a:bgFillStyleLst>
     </a:fmtScheme>
   </a:themeElements>
-  <a:objectDefaults/>
   <a:extraClrSchemeLst>
     <a:extraClrScheme>
       <a:clrScheme name="3_自訂設計 1">
@@ -30198,8 +30474,6 @@
       </a:bgFillStyleLst>
     </a:fmtScheme>
   </a:themeElements>
-  <a:objectDefaults/>
-  <a:extraClrSchemeLst/>
   <a:extLst>
     <a:ext uri="{05A4C25C-085E-4340-85A3-A5531E510DB2}">
       <thm15:themeFamily xmlns:thm15="http://schemas.microsoft.com/office/thememl/2012/main" name="Office Theme" id="{62F939B6-93AF-4DB8-9C6B-D6C7DFDC589F}" vid="{4A3C46E8-61CC-4603-A589-7422A47A8E4A}"/>
@@ -30428,7 +30702,6 @@
       </a:bgFillStyleLst>
     </a:fmtScheme>
   </a:themeElements>
-  <a:objectDefaults/>
   <a:extraClrSchemeLst>
     <a:extraClrScheme>
       <a:clrScheme name="3_自訂設計 1">
@@ -31211,8 +31484,6 @@
       </a:bgFillStyleLst>
     </a:fmtScheme>
   </a:themeElements>
-  <a:objectDefaults/>
-  <a:extraClrSchemeLst/>
   <a:extLst>
     <a:ext uri="{05A4C25C-085E-4340-85A3-A5531E510DB2}">
       <thm15:themeFamily xmlns:thm15="http://schemas.microsoft.com/office/thememl/2012/main" name="Office Theme" id="{62F939B6-93AF-4DB8-9C6B-D6C7DFDC589F}" vid="{4A3C46E8-61CC-4603-A589-7422A47A8E4A}"/>
